--- a/tools/FreeP.RenderCompare/corpus/03-mixed-text.pptx
+++ b/tools/FreeP.RenderCompare/corpus/03-mixed-text.pptx
@@ -129,7 +129,7 @@
           <p:cNvPr id="2" name="Title 1">
             <a:extLst>
               <a:ext uri="{FF2B5EF4-FFF2-40B4-BE49-F238E27FC236}">
-                <a16:creationId xmlns:a16="http://schemas.microsoft.com/office/drawing/2014/main" id="{7C484DFA-7C59-1B38-385C-1E6F91300993}"/>
+                <a16:creationId xmlns:a16="http://schemas.microsoft.com/office/drawing/2014/main" id="{6EF81B7B-5041-0BB7-88F0-B80F42F1AA7B}"/>
               </a:ext>
             </a:extLst>
           </p:cNvPr>
@@ -166,7 +166,7 @@
           <p:cNvPr id="3" name="Subtitle 2">
             <a:extLst>
               <a:ext uri="{FF2B5EF4-FFF2-40B4-BE49-F238E27FC236}">
-                <a16:creationId xmlns:a16="http://schemas.microsoft.com/office/drawing/2014/main" id="{5B0C94FF-62EF-5E32-AD94-67C59B28986C}"/>
+                <a16:creationId xmlns:a16="http://schemas.microsoft.com/office/drawing/2014/main" id="{3BE2020F-6E80-79C1-8958-E9F4A11E232F}"/>
               </a:ext>
             </a:extLst>
           </p:cNvPr>
@@ -236,7 +236,7 @@
           <p:cNvPr id="4" name="Date Placeholder 3">
             <a:extLst>
               <a:ext uri="{FF2B5EF4-FFF2-40B4-BE49-F238E27FC236}">
-                <a16:creationId xmlns:a16="http://schemas.microsoft.com/office/drawing/2014/main" id="{66D3B016-BD56-A224-2448-AA25847A616C}"/>
+                <a16:creationId xmlns:a16="http://schemas.microsoft.com/office/drawing/2014/main" id="{3A21F302-7894-59D1-6757-63D9C437284A}"/>
               </a:ext>
             </a:extLst>
           </p:cNvPr>
@@ -252,7 +252,7 @@
           <a:bodyPr/>
           <a:lstStyle/>
           <a:p>
-            <a:fld id="{8E169C9A-8C24-4FBE-BC3E-FFB6EDBFE3E6}" type="datetimeFigureOut">
+            <a:fld id="{D94B95D7-4A4B-4A15-A50F-2E9AB618FB15}" type="datetimeFigureOut">
               <a:rPr lang="en-US" smtClean="0"/>
               <a:t>6/25/2026</a:t>
             </a:fld>
@@ -265,7 +265,7 @@
           <p:cNvPr id="5" name="Footer Placeholder 4">
             <a:extLst>
               <a:ext uri="{FF2B5EF4-FFF2-40B4-BE49-F238E27FC236}">
-                <a16:creationId xmlns:a16="http://schemas.microsoft.com/office/drawing/2014/main" id="{B1379E7F-B31F-FE77-6B61-AB0EA16F85FC}"/>
+                <a16:creationId xmlns:a16="http://schemas.microsoft.com/office/drawing/2014/main" id="{C775EFA8-5005-F72D-8823-F563780C60A0}"/>
               </a:ext>
             </a:extLst>
           </p:cNvPr>
@@ -290,7 +290,7 @@
           <p:cNvPr id="6" name="Slide Number Placeholder 5">
             <a:extLst>
               <a:ext uri="{FF2B5EF4-FFF2-40B4-BE49-F238E27FC236}">
-                <a16:creationId xmlns:a16="http://schemas.microsoft.com/office/drawing/2014/main" id="{38D12A85-421E-FA92-2F19-1519B46EAA52}"/>
+                <a16:creationId xmlns:a16="http://schemas.microsoft.com/office/drawing/2014/main" id="{A90DA546-1383-D479-B8F9-07A1E1CA769C}"/>
               </a:ext>
             </a:extLst>
           </p:cNvPr>
@@ -306,7 +306,7 @@
           <a:bodyPr/>
           <a:lstStyle/>
           <a:p>
-            <a:fld id="{D70C7BE8-5040-4A5D-8114-94A50441A207}" type="slidenum">
+            <a:fld id="{3CE3ACC0-AFC4-411B-8425-8A48D90929E1}" type="slidenum">
               <a:rPr lang="en-US" smtClean="0"/>
               <a:t>‹#›</a:t>
             </a:fld>
@@ -317,7 +317,7 @@
     </p:spTree>
     <p:extLst>
       <p:ext uri="{BB962C8B-B14F-4D97-AF65-F5344CB8AC3E}">
-        <p14:creationId xmlns:p14="http://schemas.microsoft.com/office/powerpoint/2010/main" val="2646165615"/>
+        <p14:creationId xmlns:p14="http://schemas.microsoft.com/office/powerpoint/2010/main" val="1446924625"/>
       </p:ext>
     </p:extLst>
   </p:cSld>
@@ -349,7 +349,7 @@
           <p:cNvPr id="2" name="Title 1">
             <a:extLst>
               <a:ext uri="{FF2B5EF4-FFF2-40B4-BE49-F238E27FC236}">
-                <a16:creationId xmlns:a16="http://schemas.microsoft.com/office/drawing/2014/main" id="{C2447113-0D23-BEBA-B1DD-EC5C55112BC0}"/>
+                <a16:creationId xmlns:a16="http://schemas.microsoft.com/office/drawing/2014/main" id="{C2A6CF2B-36DD-7789-AE54-AFA826C02970}"/>
               </a:ext>
             </a:extLst>
           </p:cNvPr>
@@ -377,7 +377,7 @@
           <p:cNvPr id="3" name="Vertical Text Placeholder 2">
             <a:extLst>
               <a:ext uri="{FF2B5EF4-FFF2-40B4-BE49-F238E27FC236}">
-                <a16:creationId xmlns:a16="http://schemas.microsoft.com/office/drawing/2014/main" id="{39EEF45B-74C6-41CD-6EBE-E650F37018DE}"/>
+                <a16:creationId xmlns:a16="http://schemas.microsoft.com/office/drawing/2014/main" id="{F693EC01-D007-AC4D-55FC-FF497DB007BE}"/>
               </a:ext>
             </a:extLst>
           </p:cNvPr>
@@ -434,7 +434,7 @@
           <p:cNvPr id="4" name="Date Placeholder 3">
             <a:extLst>
               <a:ext uri="{FF2B5EF4-FFF2-40B4-BE49-F238E27FC236}">
-                <a16:creationId xmlns:a16="http://schemas.microsoft.com/office/drawing/2014/main" id="{5F4E5E43-DD39-BD1B-37CC-BAEA5FFFF591}"/>
+                <a16:creationId xmlns:a16="http://schemas.microsoft.com/office/drawing/2014/main" id="{92E4344F-BDF5-1ACD-6A4C-A9EAB847FC52}"/>
               </a:ext>
             </a:extLst>
           </p:cNvPr>
@@ -450,7 +450,7 @@
           <a:bodyPr/>
           <a:lstStyle/>
           <a:p>
-            <a:fld id="{8E169C9A-8C24-4FBE-BC3E-FFB6EDBFE3E6}" type="datetimeFigureOut">
+            <a:fld id="{D94B95D7-4A4B-4A15-A50F-2E9AB618FB15}" type="datetimeFigureOut">
               <a:rPr lang="en-US" smtClean="0"/>
               <a:t>6/25/2026</a:t>
             </a:fld>
@@ -463,7 +463,7 @@
           <p:cNvPr id="5" name="Footer Placeholder 4">
             <a:extLst>
               <a:ext uri="{FF2B5EF4-FFF2-40B4-BE49-F238E27FC236}">
-                <a16:creationId xmlns:a16="http://schemas.microsoft.com/office/drawing/2014/main" id="{D73AD22F-16FD-6831-FB8B-967C494103B1}"/>
+                <a16:creationId xmlns:a16="http://schemas.microsoft.com/office/drawing/2014/main" id="{01F9CB66-CC8B-B0CF-BB30-0912C4411890}"/>
               </a:ext>
             </a:extLst>
           </p:cNvPr>
@@ -488,7 +488,7 @@
           <p:cNvPr id="6" name="Slide Number Placeholder 5">
             <a:extLst>
               <a:ext uri="{FF2B5EF4-FFF2-40B4-BE49-F238E27FC236}">
-                <a16:creationId xmlns:a16="http://schemas.microsoft.com/office/drawing/2014/main" id="{FD08C6AF-7F44-5F84-0A70-38434A742C19}"/>
+                <a16:creationId xmlns:a16="http://schemas.microsoft.com/office/drawing/2014/main" id="{46F7016D-208A-E558-17EA-5FF1EEF1F76A}"/>
               </a:ext>
             </a:extLst>
           </p:cNvPr>
@@ -504,7 +504,7 @@
           <a:bodyPr/>
           <a:lstStyle/>
           <a:p>
-            <a:fld id="{D70C7BE8-5040-4A5D-8114-94A50441A207}" type="slidenum">
+            <a:fld id="{3CE3ACC0-AFC4-411B-8425-8A48D90929E1}" type="slidenum">
               <a:rPr lang="en-US" smtClean="0"/>
               <a:t>‹#›</a:t>
             </a:fld>
@@ -515,7 +515,7 @@
     </p:spTree>
     <p:extLst>
       <p:ext uri="{BB962C8B-B14F-4D97-AF65-F5344CB8AC3E}">
-        <p14:creationId xmlns:p14="http://schemas.microsoft.com/office/powerpoint/2010/main" val="934794859"/>
+        <p14:creationId xmlns:p14="http://schemas.microsoft.com/office/powerpoint/2010/main" val="3165187049"/>
       </p:ext>
     </p:extLst>
   </p:cSld>
@@ -547,7 +547,7 @@
           <p:cNvPr id="2" name="Vertical Title 1">
             <a:extLst>
               <a:ext uri="{FF2B5EF4-FFF2-40B4-BE49-F238E27FC236}">
-                <a16:creationId xmlns:a16="http://schemas.microsoft.com/office/drawing/2014/main" id="{02514FDA-EE18-660B-042F-C42F6E56C041}"/>
+                <a16:creationId xmlns:a16="http://schemas.microsoft.com/office/drawing/2014/main" id="{16090AF2-39B5-60E9-A7A2-575688E85211}"/>
               </a:ext>
             </a:extLst>
           </p:cNvPr>
@@ -580,7 +580,7 @@
           <p:cNvPr id="3" name="Vertical Text Placeholder 2">
             <a:extLst>
               <a:ext uri="{FF2B5EF4-FFF2-40B4-BE49-F238E27FC236}">
-                <a16:creationId xmlns:a16="http://schemas.microsoft.com/office/drawing/2014/main" id="{CA54288C-D947-CD57-AF84-B6D572505CE5}"/>
+                <a16:creationId xmlns:a16="http://schemas.microsoft.com/office/drawing/2014/main" id="{CD49A460-D22B-DCD8-F08E-D1D03731363D}"/>
               </a:ext>
             </a:extLst>
           </p:cNvPr>
@@ -642,7 +642,7 @@
           <p:cNvPr id="4" name="Date Placeholder 3">
             <a:extLst>
               <a:ext uri="{FF2B5EF4-FFF2-40B4-BE49-F238E27FC236}">
-                <a16:creationId xmlns:a16="http://schemas.microsoft.com/office/drawing/2014/main" id="{0B2D9C5A-D4BC-7A55-3AA6-9CBBFC8FBF6F}"/>
+                <a16:creationId xmlns:a16="http://schemas.microsoft.com/office/drawing/2014/main" id="{9358311A-7AF8-8916-0787-6C8AC8BA2864}"/>
               </a:ext>
             </a:extLst>
           </p:cNvPr>
@@ -658,7 +658,7 @@
           <a:bodyPr/>
           <a:lstStyle/>
           <a:p>
-            <a:fld id="{8E169C9A-8C24-4FBE-BC3E-FFB6EDBFE3E6}" type="datetimeFigureOut">
+            <a:fld id="{D94B95D7-4A4B-4A15-A50F-2E9AB618FB15}" type="datetimeFigureOut">
               <a:rPr lang="en-US" smtClean="0"/>
               <a:t>6/25/2026</a:t>
             </a:fld>
@@ -671,7 +671,7 @@
           <p:cNvPr id="5" name="Footer Placeholder 4">
             <a:extLst>
               <a:ext uri="{FF2B5EF4-FFF2-40B4-BE49-F238E27FC236}">
-                <a16:creationId xmlns:a16="http://schemas.microsoft.com/office/drawing/2014/main" id="{E45B6855-303F-5F07-04C4-F80667B44EB3}"/>
+                <a16:creationId xmlns:a16="http://schemas.microsoft.com/office/drawing/2014/main" id="{8F2A353C-993D-2894-24F1-57940B705BB8}"/>
               </a:ext>
             </a:extLst>
           </p:cNvPr>
@@ -696,7 +696,7 @@
           <p:cNvPr id="6" name="Slide Number Placeholder 5">
             <a:extLst>
               <a:ext uri="{FF2B5EF4-FFF2-40B4-BE49-F238E27FC236}">
-                <a16:creationId xmlns:a16="http://schemas.microsoft.com/office/drawing/2014/main" id="{9EF0BD0F-F1AB-ED0B-DACF-F50CAA038F36}"/>
+                <a16:creationId xmlns:a16="http://schemas.microsoft.com/office/drawing/2014/main" id="{B01EE3ED-9F0B-46FD-E5F6-6D11A08ED781}"/>
               </a:ext>
             </a:extLst>
           </p:cNvPr>
@@ -712,7 +712,7 @@
           <a:bodyPr/>
           <a:lstStyle/>
           <a:p>
-            <a:fld id="{D70C7BE8-5040-4A5D-8114-94A50441A207}" type="slidenum">
+            <a:fld id="{3CE3ACC0-AFC4-411B-8425-8A48D90929E1}" type="slidenum">
               <a:rPr lang="en-US" smtClean="0"/>
               <a:t>‹#›</a:t>
             </a:fld>
@@ -723,7 +723,7 @@
     </p:spTree>
     <p:extLst>
       <p:ext uri="{BB962C8B-B14F-4D97-AF65-F5344CB8AC3E}">
-        <p14:creationId xmlns:p14="http://schemas.microsoft.com/office/powerpoint/2010/main" val="1161599672"/>
+        <p14:creationId xmlns:p14="http://schemas.microsoft.com/office/powerpoint/2010/main" val="1439956070"/>
       </p:ext>
     </p:extLst>
   </p:cSld>
@@ -755,7 +755,7 @@
           <p:cNvPr id="2" name="Title 1">
             <a:extLst>
               <a:ext uri="{FF2B5EF4-FFF2-40B4-BE49-F238E27FC236}">
-                <a16:creationId xmlns:a16="http://schemas.microsoft.com/office/drawing/2014/main" id="{3E349558-FD9F-9A47-F2FA-F31492DB7EDA}"/>
+                <a16:creationId xmlns:a16="http://schemas.microsoft.com/office/drawing/2014/main" id="{0DEFA143-9BB8-B177-81F5-7A526507C17A}"/>
               </a:ext>
             </a:extLst>
           </p:cNvPr>
@@ -783,7 +783,7 @@
           <p:cNvPr id="3" name="Content Placeholder 2">
             <a:extLst>
               <a:ext uri="{FF2B5EF4-FFF2-40B4-BE49-F238E27FC236}">
-                <a16:creationId xmlns:a16="http://schemas.microsoft.com/office/drawing/2014/main" id="{072B4667-E109-DE3E-C9AF-13C1DD156C24}"/>
+                <a16:creationId xmlns:a16="http://schemas.microsoft.com/office/drawing/2014/main" id="{5E1973E3-8560-B6B9-649F-6D07F035A5E5}"/>
               </a:ext>
             </a:extLst>
           </p:cNvPr>
@@ -840,7 +840,7 @@
           <p:cNvPr id="4" name="Date Placeholder 3">
             <a:extLst>
               <a:ext uri="{FF2B5EF4-FFF2-40B4-BE49-F238E27FC236}">
-                <a16:creationId xmlns:a16="http://schemas.microsoft.com/office/drawing/2014/main" id="{6DC8EA7E-D8F0-FA42-86B8-51FD221B7D99}"/>
+                <a16:creationId xmlns:a16="http://schemas.microsoft.com/office/drawing/2014/main" id="{E5211117-884E-585D-FC0F-2B3F48B92BCF}"/>
               </a:ext>
             </a:extLst>
           </p:cNvPr>
@@ -856,7 +856,7 @@
           <a:bodyPr/>
           <a:lstStyle/>
           <a:p>
-            <a:fld id="{8E169C9A-8C24-4FBE-BC3E-FFB6EDBFE3E6}" type="datetimeFigureOut">
+            <a:fld id="{D94B95D7-4A4B-4A15-A50F-2E9AB618FB15}" type="datetimeFigureOut">
               <a:rPr lang="en-US" smtClean="0"/>
               <a:t>6/25/2026</a:t>
             </a:fld>
@@ -869,7 +869,7 @@
           <p:cNvPr id="5" name="Footer Placeholder 4">
             <a:extLst>
               <a:ext uri="{FF2B5EF4-FFF2-40B4-BE49-F238E27FC236}">
-                <a16:creationId xmlns:a16="http://schemas.microsoft.com/office/drawing/2014/main" id="{E1117E32-F602-C085-2FB7-45E8F7083784}"/>
+                <a16:creationId xmlns:a16="http://schemas.microsoft.com/office/drawing/2014/main" id="{06AB94D4-D7C2-6164-7621-5331245BC5A2}"/>
               </a:ext>
             </a:extLst>
           </p:cNvPr>
@@ -894,7 +894,7 @@
           <p:cNvPr id="6" name="Slide Number Placeholder 5">
             <a:extLst>
               <a:ext uri="{FF2B5EF4-FFF2-40B4-BE49-F238E27FC236}">
-                <a16:creationId xmlns:a16="http://schemas.microsoft.com/office/drawing/2014/main" id="{665BBB77-1693-90BC-7A6D-269E2286EE2D}"/>
+                <a16:creationId xmlns:a16="http://schemas.microsoft.com/office/drawing/2014/main" id="{115CC35F-7722-ED75-B031-2780751E19E2}"/>
               </a:ext>
             </a:extLst>
           </p:cNvPr>
@@ -910,7 +910,7 @@
           <a:bodyPr/>
           <a:lstStyle/>
           <a:p>
-            <a:fld id="{D70C7BE8-5040-4A5D-8114-94A50441A207}" type="slidenum">
+            <a:fld id="{3CE3ACC0-AFC4-411B-8425-8A48D90929E1}" type="slidenum">
               <a:rPr lang="en-US" smtClean="0"/>
               <a:t>‹#›</a:t>
             </a:fld>
@@ -921,7 +921,7 @@
     </p:spTree>
     <p:extLst>
       <p:ext uri="{BB962C8B-B14F-4D97-AF65-F5344CB8AC3E}">
-        <p14:creationId xmlns:p14="http://schemas.microsoft.com/office/powerpoint/2010/main" val="2675263635"/>
+        <p14:creationId xmlns:p14="http://schemas.microsoft.com/office/powerpoint/2010/main" val="2112841373"/>
       </p:ext>
     </p:extLst>
   </p:cSld>
@@ -953,7 +953,7 @@
           <p:cNvPr id="2" name="Title 1">
             <a:extLst>
               <a:ext uri="{FF2B5EF4-FFF2-40B4-BE49-F238E27FC236}">
-                <a16:creationId xmlns:a16="http://schemas.microsoft.com/office/drawing/2014/main" id="{DD2658F8-2BD2-B5C6-1062-A6F144805556}"/>
+                <a16:creationId xmlns:a16="http://schemas.microsoft.com/office/drawing/2014/main" id="{6F1AA40D-4F56-C442-15C2-CAC3783A60D3}"/>
               </a:ext>
             </a:extLst>
           </p:cNvPr>
@@ -990,7 +990,7 @@
           <p:cNvPr id="3" name="Text Placeholder 2">
             <a:extLst>
               <a:ext uri="{FF2B5EF4-FFF2-40B4-BE49-F238E27FC236}">
-                <a16:creationId xmlns:a16="http://schemas.microsoft.com/office/drawing/2014/main" id="{8B13CC16-DE74-7260-B0D3-CDC0257A9FE3}"/>
+                <a16:creationId xmlns:a16="http://schemas.microsoft.com/office/drawing/2014/main" id="{CEF8235F-2178-C7E1-023A-A493BC4C1240}"/>
               </a:ext>
             </a:extLst>
           </p:cNvPr>
@@ -1115,7 +1115,7 @@
           <p:cNvPr id="4" name="Date Placeholder 3">
             <a:extLst>
               <a:ext uri="{FF2B5EF4-FFF2-40B4-BE49-F238E27FC236}">
-                <a16:creationId xmlns:a16="http://schemas.microsoft.com/office/drawing/2014/main" id="{6AD98AE6-1437-0736-67B7-BD2BEC5D7BE1}"/>
+                <a16:creationId xmlns:a16="http://schemas.microsoft.com/office/drawing/2014/main" id="{242ACE32-59EF-D58D-2913-D92EA9B085CE}"/>
               </a:ext>
             </a:extLst>
           </p:cNvPr>
@@ -1131,7 +1131,7 @@
           <a:bodyPr/>
           <a:lstStyle/>
           <a:p>
-            <a:fld id="{8E169C9A-8C24-4FBE-BC3E-FFB6EDBFE3E6}" type="datetimeFigureOut">
+            <a:fld id="{D94B95D7-4A4B-4A15-A50F-2E9AB618FB15}" type="datetimeFigureOut">
               <a:rPr lang="en-US" smtClean="0"/>
               <a:t>6/25/2026</a:t>
             </a:fld>
@@ -1144,7 +1144,7 @@
           <p:cNvPr id="5" name="Footer Placeholder 4">
             <a:extLst>
               <a:ext uri="{FF2B5EF4-FFF2-40B4-BE49-F238E27FC236}">
-                <a16:creationId xmlns:a16="http://schemas.microsoft.com/office/drawing/2014/main" id="{F394543E-CA89-99F4-91BA-C4338D6F74B9}"/>
+                <a16:creationId xmlns:a16="http://schemas.microsoft.com/office/drawing/2014/main" id="{67127A95-714D-3AC0-BFDE-CCC4E32284D4}"/>
               </a:ext>
             </a:extLst>
           </p:cNvPr>
@@ -1169,7 +1169,7 @@
           <p:cNvPr id="6" name="Slide Number Placeholder 5">
             <a:extLst>
               <a:ext uri="{FF2B5EF4-FFF2-40B4-BE49-F238E27FC236}">
-                <a16:creationId xmlns:a16="http://schemas.microsoft.com/office/drawing/2014/main" id="{31666E9F-34C1-544E-1B40-99A86ACC365C}"/>
+                <a16:creationId xmlns:a16="http://schemas.microsoft.com/office/drawing/2014/main" id="{4F897552-817C-8C12-C9FB-5C194291C690}"/>
               </a:ext>
             </a:extLst>
           </p:cNvPr>
@@ -1185,7 +1185,7 @@
           <a:bodyPr/>
           <a:lstStyle/>
           <a:p>
-            <a:fld id="{D70C7BE8-5040-4A5D-8114-94A50441A207}" type="slidenum">
+            <a:fld id="{3CE3ACC0-AFC4-411B-8425-8A48D90929E1}" type="slidenum">
               <a:rPr lang="en-US" smtClean="0"/>
               <a:t>‹#›</a:t>
             </a:fld>
@@ -1196,7 +1196,7 @@
     </p:spTree>
     <p:extLst>
       <p:ext uri="{BB962C8B-B14F-4D97-AF65-F5344CB8AC3E}">
-        <p14:creationId xmlns:p14="http://schemas.microsoft.com/office/powerpoint/2010/main" val="2600894615"/>
+        <p14:creationId xmlns:p14="http://schemas.microsoft.com/office/powerpoint/2010/main" val="1626390503"/>
       </p:ext>
     </p:extLst>
   </p:cSld>
@@ -1228,7 +1228,7 @@
           <p:cNvPr id="2" name="Title 1">
             <a:extLst>
               <a:ext uri="{FF2B5EF4-FFF2-40B4-BE49-F238E27FC236}">
-                <a16:creationId xmlns:a16="http://schemas.microsoft.com/office/drawing/2014/main" id="{721B5E17-C8CA-734E-B52D-F8AAD4894B80}"/>
+                <a16:creationId xmlns:a16="http://schemas.microsoft.com/office/drawing/2014/main" id="{6FE523D6-9E4C-DD34-C784-4E6CDDC667F2}"/>
               </a:ext>
             </a:extLst>
           </p:cNvPr>
@@ -1256,7 +1256,7 @@
           <p:cNvPr id="3" name="Content Placeholder 2">
             <a:extLst>
               <a:ext uri="{FF2B5EF4-FFF2-40B4-BE49-F238E27FC236}">
-                <a16:creationId xmlns:a16="http://schemas.microsoft.com/office/drawing/2014/main" id="{68310D17-8D81-9B31-06D7-6A7ABE1E3A26}"/>
+                <a16:creationId xmlns:a16="http://schemas.microsoft.com/office/drawing/2014/main" id="{F3908777-6287-C106-C5C6-394334127E96}"/>
               </a:ext>
             </a:extLst>
           </p:cNvPr>
@@ -1318,7 +1318,7 @@
           <p:cNvPr id="4" name="Content Placeholder 3">
             <a:extLst>
               <a:ext uri="{FF2B5EF4-FFF2-40B4-BE49-F238E27FC236}">
-                <a16:creationId xmlns:a16="http://schemas.microsoft.com/office/drawing/2014/main" id="{91CFAA1F-E81B-6EBC-E534-4C4F95F2F941}"/>
+                <a16:creationId xmlns:a16="http://schemas.microsoft.com/office/drawing/2014/main" id="{EC00DDF2-FAB1-3BDF-CF15-F0898C06BAD6}"/>
               </a:ext>
             </a:extLst>
           </p:cNvPr>
@@ -1380,7 +1380,7 @@
           <p:cNvPr id="5" name="Date Placeholder 4">
             <a:extLst>
               <a:ext uri="{FF2B5EF4-FFF2-40B4-BE49-F238E27FC236}">
-                <a16:creationId xmlns:a16="http://schemas.microsoft.com/office/drawing/2014/main" id="{EE6B1D6D-DFC7-4FBC-0FC5-85E27A1602BE}"/>
+                <a16:creationId xmlns:a16="http://schemas.microsoft.com/office/drawing/2014/main" id="{6500506C-8FB9-DC6B-FE80-CF4D0C99D391}"/>
               </a:ext>
             </a:extLst>
           </p:cNvPr>
@@ -1396,7 +1396,7 @@
           <a:bodyPr/>
           <a:lstStyle/>
           <a:p>
-            <a:fld id="{8E169C9A-8C24-4FBE-BC3E-FFB6EDBFE3E6}" type="datetimeFigureOut">
+            <a:fld id="{D94B95D7-4A4B-4A15-A50F-2E9AB618FB15}" type="datetimeFigureOut">
               <a:rPr lang="en-US" smtClean="0"/>
               <a:t>6/25/2026</a:t>
             </a:fld>
@@ -1409,7 +1409,7 @@
           <p:cNvPr id="6" name="Footer Placeholder 5">
             <a:extLst>
               <a:ext uri="{FF2B5EF4-FFF2-40B4-BE49-F238E27FC236}">
-                <a16:creationId xmlns:a16="http://schemas.microsoft.com/office/drawing/2014/main" id="{4488DBC1-65B3-40DE-0437-7241EFA2CE8D}"/>
+                <a16:creationId xmlns:a16="http://schemas.microsoft.com/office/drawing/2014/main" id="{9A3A363E-D270-07D6-9371-891390647C5C}"/>
               </a:ext>
             </a:extLst>
           </p:cNvPr>
@@ -1434,7 +1434,7 @@
           <p:cNvPr id="7" name="Slide Number Placeholder 6">
             <a:extLst>
               <a:ext uri="{FF2B5EF4-FFF2-40B4-BE49-F238E27FC236}">
-                <a16:creationId xmlns:a16="http://schemas.microsoft.com/office/drawing/2014/main" id="{38FBBE7D-1918-9B79-5DC0-E7A798000888}"/>
+                <a16:creationId xmlns:a16="http://schemas.microsoft.com/office/drawing/2014/main" id="{EF842CB8-9EAF-12A8-51A3-A7C0F6C45CF9}"/>
               </a:ext>
             </a:extLst>
           </p:cNvPr>
@@ -1450,7 +1450,7 @@
           <a:bodyPr/>
           <a:lstStyle/>
           <a:p>
-            <a:fld id="{D70C7BE8-5040-4A5D-8114-94A50441A207}" type="slidenum">
+            <a:fld id="{3CE3ACC0-AFC4-411B-8425-8A48D90929E1}" type="slidenum">
               <a:rPr lang="en-US" smtClean="0"/>
               <a:t>‹#›</a:t>
             </a:fld>
@@ -1461,7 +1461,7 @@
     </p:spTree>
     <p:extLst>
       <p:ext uri="{BB962C8B-B14F-4D97-AF65-F5344CB8AC3E}">
-        <p14:creationId xmlns:p14="http://schemas.microsoft.com/office/powerpoint/2010/main" val="3510311362"/>
+        <p14:creationId xmlns:p14="http://schemas.microsoft.com/office/powerpoint/2010/main" val="2320754401"/>
       </p:ext>
     </p:extLst>
   </p:cSld>
@@ -1493,7 +1493,7 @@
           <p:cNvPr id="2" name="Title 1">
             <a:extLst>
               <a:ext uri="{FF2B5EF4-FFF2-40B4-BE49-F238E27FC236}">
-                <a16:creationId xmlns:a16="http://schemas.microsoft.com/office/drawing/2014/main" id="{BB4D3A1C-239D-C2C3-2DC9-642864207948}"/>
+                <a16:creationId xmlns:a16="http://schemas.microsoft.com/office/drawing/2014/main" id="{7A19D0CB-0E19-0408-D1A3-0BA19803361C}"/>
               </a:ext>
             </a:extLst>
           </p:cNvPr>
@@ -1526,7 +1526,7 @@
           <p:cNvPr id="3" name="Text Placeholder 2">
             <a:extLst>
               <a:ext uri="{FF2B5EF4-FFF2-40B4-BE49-F238E27FC236}">
-                <a16:creationId xmlns:a16="http://schemas.microsoft.com/office/drawing/2014/main" id="{E9D094B7-914B-7E6C-90D0-654FD66DABF6}"/>
+                <a16:creationId xmlns:a16="http://schemas.microsoft.com/office/drawing/2014/main" id="{223C4666-1B38-54A2-67F4-7577EE2DB15E}"/>
               </a:ext>
             </a:extLst>
           </p:cNvPr>
@@ -1597,7 +1597,7 @@
           <p:cNvPr id="4" name="Content Placeholder 3">
             <a:extLst>
               <a:ext uri="{FF2B5EF4-FFF2-40B4-BE49-F238E27FC236}">
-                <a16:creationId xmlns:a16="http://schemas.microsoft.com/office/drawing/2014/main" id="{4F3DCE5C-FD63-9161-F6CA-C407C8CAD173}"/>
+                <a16:creationId xmlns:a16="http://schemas.microsoft.com/office/drawing/2014/main" id="{6F250AB9-1D1F-A8A3-4EF1-7F5FCACC7634}"/>
               </a:ext>
             </a:extLst>
           </p:cNvPr>
@@ -1659,7 +1659,7 @@
           <p:cNvPr id="5" name="Text Placeholder 4">
             <a:extLst>
               <a:ext uri="{FF2B5EF4-FFF2-40B4-BE49-F238E27FC236}">
-                <a16:creationId xmlns:a16="http://schemas.microsoft.com/office/drawing/2014/main" id="{59F4552F-02D1-8663-C0D7-F1B73189667F}"/>
+                <a16:creationId xmlns:a16="http://schemas.microsoft.com/office/drawing/2014/main" id="{CC13E6C6-EE43-5379-C38C-D4BD7BFEC789}"/>
               </a:ext>
             </a:extLst>
           </p:cNvPr>
@@ -1730,7 +1730,7 @@
           <p:cNvPr id="6" name="Content Placeholder 5">
             <a:extLst>
               <a:ext uri="{FF2B5EF4-FFF2-40B4-BE49-F238E27FC236}">
-                <a16:creationId xmlns:a16="http://schemas.microsoft.com/office/drawing/2014/main" id="{839B43F0-FABD-16B5-3F01-71988D72073A}"/>
+                <a16:creationId xmlns:a16="http://schemas.microsoft.com/office/drawing/2014/main" id="{395E2866-0D88-8EBC-2CD3-D22825C489F2}"/>
               </a:ext>
             </a:extLst>
           </p:cNvPr>
@@ -1792,7 +1792,7 @@
           <p:cNvPr id="7" name="Date Placeholder 6">
             <a:extLst>
               <a:ext uri="{FF2B5EF4-FFF2-40B4-BE49-F238E27FC236}">
-                <a16:creationId xmlns:a16="http://schemas.microsoft.com/office/drawing/2014/main" id="{F1517A69-6D3B-A580-381D-D89CE208961F}"/>
+                <a16:creationId xmlns:a16="http://schemas.microsoft.com/office/drawing/2014/main" id="{4B9B9516-9968-2F97-0ABE-B94680B2D3C1}"/>
               </a:ext>
             </a:extLst>
           </p:cNvPr>
@@ -1808,7 +1808,7 @@
           <a:bodyPr/>
           <a:lstStyle/>
           <a:p>
-            <a:fld id="{8E169C9A-8C24-4FBE-BC3E-FFB6EDBFE3E6}" type="datetimeFigureOut">
+            <a:fld id="{D94B95D7-4A4B-4A15-A50F-2E9AB618FB15}" type="datetimeFigureOut">
               <a:rPr lang="en-US" smtClean="0"/>
               <a:t>6/25/2026</a:t>
             </a:fld>
@@ -1821,7 +1821,7 @@
           <p:cNvPr id="8" name="Footer Placeholder 7">
             <a:extLst>
               <a:ext uri="{FF2B5EF4-FFF2-40B4-BE49-F238E27FC236}">
-                <a16:creationId xmlns:a16="http://schemas.microsoft.com/office/drawing/2014/main" id="{32086B63-1A96-FF26-3033-F158B5B32863}"/>
+                <a16:creationId xmlns:a16="http://schemas.microsoft.com/office/drawing/2014/main" id="{F2089ED2-B8F8-D6E0-34ED-7B14F20D70F5}"/>
               </a:ext>
             </a:extLst>
           </p:cNvPr>
@@ -1846,7 +1846,7 @@
           <p:cNvPr id="9" name="Slide Number Placeholder 8">
             <a:extLst>
               <a:ext uri="{FF2B5EF4-FFF2-40B4-BE49-F238E27FC236}">
-                <a16:creationId xmlns:a16="http://schemas.microsoft.com/office/drawing/2014/main" id="{3FBC4828-4AF9-AA47-D9CB-EB0E112DA1F3}"/>
+                <a16:creationId xmlns:a16="http://schemas.microsoft.com/office/drawing/2014/main" id="{A1A9ADE3-D138-17C8-CDB9-5567862A6438}"/>
               </a:ext>
             </a:extLst>
           </p:cNvPr>
@@ -1862,7 +1862,7 @@
           <a:bodyPr/>
           <a:lstStyle/>
           <a:p>
-            <a:fld id="{D70C7BE8-5040-4A5D-8114-94A50441A207}" type="slidenum">
+            <a:fld id="{3CE3ACC0-AFC4-411B-8425-8A48D90929E1}" type="slidenum">
               <a:rPr lang="en-US" smtClean="0"/>
               <a:t>‹#›</a:t>
             </a:fld>
@@ -1873,7 +1873,7 @@
     </p:spTree>
     <p:extLst>
       <p:ext uri="{BB962C8B-B14F-4D97-AF65-F5344CB8AC3E}">
-        <p14:creationId xmlns:p14="http://schemas.microsoft.com/office/powerpoint/2010/main" val="2866776059"/>
+        <p14:creationId xmlns:p14="http://schemas.microsoft.com/office/powerpoint/2010/main" val="3846634296"/>
       </p:ext>
     </p:extLst>
   </p:cSld>
@@ -1905,7 +1905,7 @@
           <p:cNvPr id="2" name="Title 1">
             <a:extLst>
               <a:ext uri="{FF2B5EF4-FFF2-40B4-BE49-F238E27FC236}">
-                <a16:creationId xmlns:a16="http://schemas.microsoft.com/office/drawing/2014/main" id="{DE6C5B4F-04A2-05E6-7BA5-82F7A7BF40FE}"/>
+                <a16:creationId xmlns:a16="http://schemas.microsoft.com/office/drawing/2014/main" id="{2019E142-E728-BAFE-212B-3D3678AD08A1}"/>
               </a:ext>
             </a:extLst>
           </p:cNvPr>
@@ -1933,7 +1933,7 @@
           <p:cNvPr id="3" name="Date Placeholder 2">
             <a:extLst>
               <a:ext uri="{FF2B5EF4-FFF2-40B4-BE49-F238E27FC236}">
-                <a16:creationId xmlns:a16="http://schemas.microsoft.com/office/drawing/2014/main" id="{A16332ED-038F-B2C2-BFF1-B60AE27CCB42}"/>
+                <a16:creationId xmlns:a16="http://schemas.microsoft.com/office/drawing/2014/main" id="{711EC7D6-B38A-6DFF-3D0C-14B9748C5644}"/>
               </a:ext>
             </a:extLst>
           </p:cNvPr>
@@ -1949,7 +1949,7 @@
           <a:bodyPr/>
           <a:lstStyle/>
           <a:p>
-            <a:fld id="{8E169C9A-8C24-4FBE-BC3E-FFB6EDBFE3E6}" type="datetimeFigureOut">
+            <a:fld id="{D94B95D7-4A4B-4A15-A50F-2E9AB618FB15}" type="datetimeFigureOut">
               <a:rPr lang="en-US" smtClean="0"/>
               <a:t>6/25/2026</a:t>
             </a:fld>
@@ -1962,7 +1962,7 @@
           <p:cNvPr id="4" name="Footer Placeholder 3">
             <a:extLst>
               <a:ext uri="{FF2B5EF4-FFF2-40B4-BE49-F238E27FC236}">
-                <a16:creationId xmlns:a16="http://schemas.microsoft.com/office/drawing/2014/main" id="{91B79695-5121-AFFB-C216-4AA704F73E60}"/>
+                <a16:creationId xmlns:a16="http://schemas.microsoft.com/office/drawing/2014/main" id="{96A07EFC-5ACE-ECC8-833A-267535CBD714}"/>
               </a:ext>
             </a:extLst>
           </p:cNvPr>
@@ -1987,7 +1987,7 @@
           <p:cNvPr id="5" name="Slide Number Placeholder 4">
             <a:extLst>
               <a:ext uri="{FF2B5EF4-FFF2-40B4-BE49-F238E27FC236}">
-                <a16:creationId xmlns:a16="http://schemas.microsoft.com/office/drawing/2014/main" id="{7BBB4AEA-031B-E5AC-5558-2CB4F20D2E3F}"/>
+                <a16:creationId xmlns:a16="http://schemas.microsoft.com/office/drawing/2014/main" id="{1DAF5446-99BD-4C81-2D9A-B5DCF535C7E1}"/>
               </a:ext>
             </a:extLst>
           </p:cNvPr>
@@ -2003,7 +2003,7 @@
           <a:bodyPr/>
           <a:lstStyle/>
           <a:p>
-            <a:fld id="{D70C7BE8-5040-4A5D-8114-94A50441A207}" type="slidenum">
+            <a:fld id="{3CE3ACC0-AFC4-411B-8425-8A48D90929E1}" type="slidenum">
               <a:rPr lang="en-US" smtClean="0"/>
               <a:t>‹#›</a:t>
             </a:fld>
@@ -2014,7 +2014,7 @@
     </p:spTree>
     <p:extLst>
       <p:ext uri="{BB962C8B-B14F-4D97-AF65-F5344CB8AC3E}">
-        <p14:creationId xmlns:p14="http://schemas.microsoft.com/office/powerpoint/2010/main" val="1293693485"/>
+        <p14:creationId xmlns:p14="http://schemas.microsoft.com/office/powerpoint/2010/main" val="2971724000"/>
       </p:ext>
     </p:extLst>
   </p:cSld>
@@ -2046,7 +2046,7 @@
           <p:cNvPr id="2" name="Date Placeholder 1">
             <a:extLst>
               <a:ext uri="{FF2B5EF4-FFF2-40B4-BE49-F238E27FC236}">
-                <a16:creationId xmlns:a16="http://schemas.microsoft.com/office/drawing/2014/main" id="{0DC9DC6A-7C24-0497-0609-8F3CBA22E090}"/>
+                <a16:creationId xmlns:a16="http://schemas.microsoft.com/office/drawing/2014/main" id="{0978357C-C994-C975-6DA6-9F497CE5069F}"/>
               </a:ext>
             </a:extLst>
           </p:cNvPr>
@@ -2062,7 +2062,7 @@
           <a:bodyPr/>
           <a:lstStyle/>
           <a:p>
-            <a:fld id="{8E169C9A-8C24-4FBE-BC3E-FFB6EDBFE3E6}" type="datetimeFigureOut">
+            <a:fld id="{D94B95D7-4A4B-4A15-A50F-2E9AB618FB15}" type="datetimeFigureOut">
               <a:rPr lang="en-US" smtClean="0"/>
               <a:t>6/25/2026</a:t>
             </a:fld>
@@ -2075,7 +2075,7 @@
           <p:cNvPr id="3" name="Footer Placeholder 2">
             <a:extLst>
               <a:ext uri="{FF2B5EF4-FFF2-40B4-BE49-F238E27FC236}">
-                <a16:creationId xmlns:a16="http://schemas.microsoft.com/office/drawing/2014/main" id="{CE3300F6-DA68-61F4-18C2-D4C90EBA5CA8}"/>
+                <a16:creationId xmlns:a16="http://schemas.microsoft.com/office/drawing/2014/main" id="{1C78C61C-AD3D-9D0E-92E5-98B9B63F136D}"/>
               </a:ext>
             </a:extLst>
           </p:cNvPr>
@@ -2100,7 +2100,7 @@
           <p:cNvPr id="4" name="Slide Number Placeholder 3">
             <a:extLst>
               <a:ext uri="{FF2B5EF4-FFF2-40B4-BE49-F238E27FC236}">
-                <a16:creationId xmlns:a16="http://schemas.microsoft.com/office/drawing/2014/main" id="{304C0F2C-FD5E-B629-BF38-39E387E0C012}"/>
+                <a16:creationId xmlns:a16="http://schemas.microsoft.com/office/drawing/2014/main" id="{D0D292DC-799F-1A2C-1874-7EAD0C1AD449}"/>
               </a:ext>
             </a:extLst>
           </p:cNvPr>
@@ -2116,7 +2116,7 @@
           <a:bodyPr/>
           <a:lstStyle/>
           <a:p>
-            <a:fld id="{D70C7BE8-5040-4A5D-8114-94A50441A207}" type="slidenum">
+            <a:fld id="{3CE3ACC0-AFC4-411B-8425-8A48D90929E1}" type="slidenum">
               <a:rPr lang="en-US" smtClean="0"/>
               <a:t>‹#›</a:t>
             </a:fld>
@@ -2127,7 +2127,7 @@
     </p:spTree>
     <p:extLst>
       <p:ext uri="{BB962C8B-B14F-4D97-AF65-F5344CB8AC3E}">
-        <p14:creationId xmlns:p14="http://schemas.microsoft.com/office/powerpoint/2010/main" val="3960171234"/>
+        <p14:creationId xmlns:p14="http://schemas.microsoft.com/office/powerpoint/2010/main" val="4075131522"/>
       </p:ext>
     </p:extLst>
   </p:cSld>
@@ -2159,7 +2159,7 @@
           <p:cNvPr id="2" name="Title 1">
             <a:extLst>
               <a:ext uri="{FF2B5EF4-FFF2-40B4-BE49-F238E27FC236}">
-                <a16:creationId xmlns:a16="http://schemas.microsoft.com/office/drawing/2014/main" id="{F2F7C3C1-49B6-6A19-75B5-C6D84559F9B1}"/>
+                <a16:creationId xmlns:a16="http://schemas.microsoft.com/office/drawing/2014/main" id="{C744ABC0-E074-D3EE-0D47-8CDA6EFA62F7}"/>
               </a:ext>
             </a:extLst>
           </p:cNvPr>
@@ -2196,7 +2196,7 @@
           <p:cNvPr id="3" name="Content Placeholder 2">
             <a:extLst>
               <a:ext uri="{FF2B5EF4-FFF2-40B4-BE49-F238E27FC236}">
-                <a16:creationId xmlns:a16="http://schemas.microsoft.com/office/drawing/2014/main" id="{381F9AA2-D07D-AF2E-DAE9-9CF82EAB3CFC}"/>
+                <a16:creationId xmlns:a16="http://schemas.microsoft.com/office/drawing/2014/main" id="{7C2C5EB9-9911-CBED-8228-B420AA12E077}"/>
               </a:ext>
             </a:extLst>
           </p:cNvPr>
@@ -2286,7 +2286,7 @@
           <p:cNvPr id="4" name="Text Placeholder 3">
             <a:extLst>
               <a:ext uri="{FF2B5EF4-FFF2-40B4-BE49-F238E27FC236}">
-                <a16:creationId xmlns:a16="http://schemas.microsoft.com/office/drawing/2014/main" id="{CB6E0E57-0AA9-C3ED-6F7A-149B231C5206}"/>
+                <a16:creationId xmlns:a16="http://schemas.microsoft.com/office/drawing/2014/main" id="{1CCF7222-88BB-FE03-05DC-8105A2E0EF9F}"/>
               </a:ext>
             </a:extLst>
           </p:cNvPr>
@@ -2357,7 +2357,7 @@
           <p:cNvPr id="5" name="Date Placeholder 4">
             <a:extLst>
               <a:ext uri="{FF2B5EF4-FFF2-40B4-BE49-F238E27FC236}">
-                <a16:creationId xmlns:a16="http://schemas.microsoft.com/office/drawing/2014/main" id="{11DE6F4F-E44B-B700-DCC6-269205F9780F}"/>
+                <a16:creationId xmlns:a16="http://schemas.microsoft.com/office/drawing/2014/main" id="{55175114-DF80-893C-6529-48763F051595}"/>
               </a:ext>
             </a:extLst>
           </p:cNvPr>
@@ -2373,7 +2373,7 @@
           <a:bodyPr/>
           <a:lstStyle/>
           <a:p>
-            <a:fld id="{8E169C9A-8C24-4FBE-BC3E-FFB6EDBFE3E6}" type="datetimeFigureOut">
+            <a:fld id="{D94B95D7-4A4B-4A15-A50F-2E9AB618FB15}" type="datetimeFigureOut">
               <a:rPr lang="en-US" smtClean="0"/>
               <a:t>6/25/2026</a:t>
             </a:fld>
@@ -2386,7 +2386,7 @@
           <p:cNvPr id="6" name="Footer Placeholder 5">
             <a:extLst>
               <a:ext uri="{FF2B5EF4-FFF2-40B4-BE49-F238E27FC236}">
-                <a16:creationId xmlns:a16="http://schemas.microsoft.com/office/drawing/2014/main" id="{AF5440FE-0070-D53C-FE17-836A0B5F8429}"/>
+                <a16:creationId xmlns:a16="http://schemas.microsoft.com/office/drawing/2014/main" id="{6DF4DC5E-ACC5-2B11-A5CB-B1E07515EE6B}"/>
               </a:ext>
             </a:extLst>
           </p:cNvPr>
@@ -2411,7 +2411,7 @@
           <p:cNvPr id="7" name="Slide Number Placeholder 6">
             <a:extLst>
               <a:ext uri="{FF2B5EF4-FFF2-40B4-BE49-F238E27FC236}">
-                <a16:creationId xmlns:a16="http://schemas.microsoft.com/office/drawing/2014/main" id="{5FD0DFE7-CE3D-8FFF-27E0-D61BF7307582}"/>
+                <a16:creationId xmlns:a16="http://schemas.microsoft.com/office/drawing/2014/main" id="{B0F180B7-DD1A-1122-4149-B8535002B7A7}"/>
               </a:ext>
             </a:extLst>
           </p:cNvPr>
@@ -2427,7 +2427,7 @@
           <a:bodyPr/>
           <a:lstStyle/>
           <a:p>
-            <a:fld id="{D70C7BE8-5040-4A5D-8114-94A50441A207}" type="slidenum">
+            <a:fld id="{3CE3ACC0-AFC4-411B-8425-8A48D90929E1}" type="slidenum">
               <a:rPr lang="en-US" smtClean="0"/>
               <a:t>‹#›</a:t>
             </a:fld>
@@ -2438,7 +2438,7 @@
     </p:spTree>
     <p:extLst>
       <p:ext uri="{BB962C8B-B14F-4D97-AF65-F5344CB8AC3E}">
-        <p14:creationId xmlns:p14="http://schemas.microsoft.com/office/powerpoint/2010/main" val="2437851699"/>
+        <p14:creationId xmlns:p14="http://schemas.microsoft.com/office/powerpoint/2010/main" val="3633282510"/>
       </p:ext>
     </p:extLst>
   </p:cSld>
@@ -2470,7 +2470,7 @@
           <p:cNvPr id="2" name="Title 1">
             <a:extLst>
               <a:ext uri="{FF2B5EF4-FFF2-40B4-BE49-F238E27FC236}">
-                <a16:creationId xmlns:a16="http://schemas.microsoft.com/office/drawing/2014/main" id="{2626D0BC-875A-B132-A632-DAC6877D0222}"/>
+                <a16:creationId xmlns:a16="http://schemas.microsoft.com/office/drawing/2014/main" id="{49873983-9D75-EF8B-7774-9A0F4DCE67DF}"/>
               </a:ext>
             </a:extLst>
           </p:cNvPr>
@@ -2507,7 +2507,7 @@
           <p:cNvPr id="3" name="Picture Placeholder 2">
             <a:extLst>
               <a:ext uri="{FF2B5EF4-FFF2-40B4-BE49-F238E27FC236}">
-                <a16:creationId xmlns:a16="http://schemas.microsoft.com/office/drawing/2014/main" id="{2DA88A22-D1E0-8D4D-97B7-19239377F10E}"/>
+                <a16:creationId xmlns:a16="http://schemas.microsoft.com/office/drawing/2014/main" id="{4F6A5A49-E1D0-3731-F2CE-97EDE4FC8298}"/>
               </a:ext>
             </a:extLst>
           </p:cNvPr>
@@ -2574,7 +2574,7 @@
           <p:cNvPr id="4" name="Text Placeholder 3">
             <a:extLst>
               <a:ext uri="{FF2B5EF4-FFF2-40B4-BE49-F238E27FC236}">
-                <a16:creationId xmlns:a16="http://schemas.microsoft.com/office/drawing/2014/main" id="{B055435E-DE15-BDAA-531B-C3A6BACD93A6}"/>
+                <a16:creationId xmlns:a16="http://schemas.microsoft.com/office/drawing/2014/main" id="{7E232D90-7ECE-16BD-F628-6C1E7A740026}"/>
               </a:ext>
             </a:extLst>
           </p:cNvPr>
@@ -2645,7 +2645,7 @@
           <p:cNvPr id="5" name="Date Placeholder 4">
             <a:extLst>
               <a:ext uri="{FF2B5EF4-FFF2-40B4-BE49-F238E27FC236}">
-                <a16:creationId xmlns:a16="http://schemas.microsoft.com/office/drawing/2014/main" id="{5178F19B-5769-C8E2-A330-C2C78CB39F97}"/>
+                <a16:creationId xmlns:a16="http://schemas.microsoft.com/office/drawing/2014/main" id="{AC5328A8-9689-4469-5A79-9090F6D9A4A9}"/>
               </a:ext>
             </a:extLst>
           </p:cNvPr>
@@ -2661,7 +2661,7 @@
           <a:bodyPr/>
           <a:lstStyle/>
           <a:p>
-            <a:fld id="{8E169C9A-8C24-4FBE-BC3E-FFB6EDBFE3E6}" type="datetimeFigureOut">
+            <a:fld id="{D94B95D7-4A4B-4A15-A50F-2E9AB618FB15}" type="datetimeFigureOut">
               <a:rPr lang="en-US" smtClean="0"/>
               <a:t>6/25/2026</a:t>
             </a:fld>
@@ -2674,7 +2674,7 @@
           <p:cNvPr id="6" name="Footer Placeholder 5">
             <a:extLst>
               <a:ext uri="{FF2B5EF4-FFF2-40B4-BE49-F238E27FC236}">
-                <a16:creationId xmlns:a16="http://schemas.microsoft.com/office/drawing/2014/main" id="{CD3CC607-512E-4FA0-6D15-480AC3671ACE}"/>
+                <a16:creationId xmlns:a16="http://schemas.microsoft.com/office/drawing/2014/main" id="{5FAB497C-6259-F502-D737-520B9B72F1B2}"/>
               </a:ext>
             </a:extLst>
           </p:cNvPr>
@@ -2699,7 +2699,7 @@
           <p:cNvPr id="7" name="Slide Number Placeholder 6">
             <a:extLst>
               <a:ext uri="{FF2B5EF4-FFF2-40B4-BE49-F238E27FC236}">
-                <a16:creationId xmlns:a16="http://schemas.microsoft.com/office/drawing/2014/main" id="{D480F43C-DDA0-3987-678F-409C4445A931}"/>
+                <a16:creationId xmlns:a16="http://schemas.microsoft.com/office/drawing/2014/main" id="{55C39E9B-0BC9-DEC6-8354-FE6B7F96D7FA}"/>
               </a:ext>
             </a:extLst>
           </p:cNvPr>
@@ -2715,7 +2715,7 @@
           <a:bodyPr/>
           <a:lstStyle/>
           <a:p>
-            <a:fld id="{D70C7BE8-5040-4A5D-8114-94A50441A207}" type="slidenum">
+            <a:fld id="{3CE3ACC0-AFC4-411B-8425-8A48D90929E1}" type="slidenum">
               <a:rPr lang="en-US" smtClean="0"/>
               <a:t>‹#›</a:t>
             </a:fld>
@@ -2726,7 +2726,7 @@
     </p:spTree>
     <p:extLst>
       <p:ext uri="{BB962C8B-B14F-4D97-AF65-F5344CB8AC3E}">
-        <p14:creationId xmlns:p14="http://schemas.microsoft.com/office/powerpoint/2010/main" val="392139101"/>
+        <p14:creationId xmlns:p14="http://schemas.microsoft.com/office/powerpoint/2010/main" val="2669485099"/>
       </p:ext>
     </p:extLst>
   </p:cSld>
@@ -2763,7 +2763,7 @@
           <p:cNvPr id="2" name="Title Placeholder 1">
             <a:extLst>
               <a:ext uri="{FF2B5EF4-FFF2-40B4-BE49-F238E27FC236}">
-                <a16:creationId xmlns:a16="http://schemas.microsoft.com/office/drawing/2014/main" id="{D3EC553B-C6C7-5C48-E16A-22D631C0D70F}"/>
+                <a16:creationId xmlns:a16="http://schemas.microsoft.com/office/drawing/2014/main" id="{10FE0D1F-2F11-3B56-4325-BBF0B9E1305B}"/>
               </a:ext>
             </a:extLst>
           </p:cNvPr>
@@ -2801,7 +2801,7 @@
           <p:cNvPr id="3" name="Text Placeholder 2">
             <a:extLst>
               <a:ext uri="{FF2B5EF4-FFF2-40B4-BE49-F238E27FC236}">
-                <a16:creationId xmlns:a16="http://schemas.microsoft.com/office/drawing/2014/main" id="{138C270C-DE2F-5AA4-3DE2-6C1AF380994F}"/>
+                <a16:creationId xmlns:a16="http://schemas.microsoft.com/office/drawing/2014/main" id="{5D080059-71DF-453D-6D02-C667339E9798}"/>
               </a:ext>
             </a:extLst>
           </p:cNvPr>
@@ -2868,7 +2868,7 @@
           <p:cNvPr id="4" name="Date Placeholder 3">
             <a:extLst>
               <a:ext uri="{FF2B5EF4-FFF2-40B4-BE49-F238E27FC236}">
-                <a16:creationId xmlns:a16="http://schemas.microsoft.com/office/drawing/2014/main" id="{E5458B98-C2BB-37B0-72A8-160F041195F7}"/>
+                <a16:creationId xmlns:a16="http://schemas.microsoft.com/office/drawing/2014/main" id="{F1BD2466-7777-C426-4D7B-E733DC110AED}"/>
               </a:ext>
             </a:extLst>
           </p:cNvPr>
@@ -2902,7 +2902,7 @@
             </a:lvl1pPr>
           </a:lstStyle>
           <a:p>
-            <a:fld id="{8E169C9A-8C24-4FBE-BC3E-FFB6EDBFE3E6}" type="datetimeFigureOut">
+            <a:fld id="{D94B95D7-4A4B-4A15-A50F-2E9AB618FB15}" type="datetimeFigureOut">
               <a:rPr lang="en-US" smtClean="0"/>
               <a:t>6/25/2026</a:t>
             </a:fld>
@@ -2915,7 +2915,7 @@
           <p:cNvPr id="5" name="Footer Placeholder 4">
             <a:extLst>
               <a:ext uri="{FF2B5EF4-FFF2-40B4-BE49-F238E27FC236}">
-                <a16:creationId xmlns:a16="http://schemas.microsoft.com/office/drawing/2014/main" id="{32C792BC-3F71-7682-68EC-97D5345623C2}"/>
+                <a16:creationId xmlns:a16="http://schemas.microsoft.com/office/drawing/2014/main" id="{E2ECDEC6-2984-9CF3-80FD-A26A9A34141A}"/>
               </a:ext>
             </a:extLst>
           </p:cNvPr>
@@ -2958,7 +2958,7 @@
           <p:cNvPr id="6" name="Slide Number Placeholder 5">
             <a:extLst>
               <a:ext uri="{FF2B5EF4-FFF2-40B4-BE49-F238E27FC236}">
-                <a16:creationId xmlns:a16="http://schemas.microsoft.com/office/drawing/2014/main" id="{5B907F12-B8ED-658F-275A-F7A214419596}"/>
+                <a16:creationId xmlns:a16="http://schemas.microsoft.com/office/drawing/2014/main" id="{60892CDB-173D-01F1-9AB2-71A139390F16}"/>
               </a:ext>
             </a:extLst>
           </p:cNvPr>
@@ -2992,7 +2992,7 @@
             </a:lvl1pPr>
           </a:lstStyle>
           <a:p>
-            <a:fld id="{D70C7BE8-5040-4A5D-8114-94A50441A207}" type="slidenum">
+            <a:fld id="{3CE3ACC0-AFC4-411B-8425-8A48D90929E1}" type="slidenum">
               <a:rPr lang="en-US" smtClean="0"/>
               <a:t>‹#›</a:t>
             </a:fld>
@@ -3003,7 +3003,7 @@
     </p:spTree>
     <p:extLst>
       <p:ext uri="{BB962C8B-B14F-4D97-AF65-F5344CB8AC3E}">
-        <p14:creationId xmlns:p14="http://schemas.microsoft.com/office/powerpoint/2010/main" val="962950170"/>
+        <p14:creationId xmlns:p14="http://schemas.microsoft.com/office/powerpoint/2010/main" val="553048486"/>
       </p:ext>
     </p:extLst>
   </p:cSld>
@@ -3326,7 +3326,7 @@
           <p:cNvPr id="2" name="TextBox 1">
             <a:extLst>
               <a:ext uri="{FF2B5EF4-FFF2-40B4-BE49-F238E27FC236}">
-                <a16:creationId xmlns:a16="http://schemas.microsoft.com/office/drawing/2014/main" id="{6E9B062A-D6C8-5584-9BD5-2628741EC877}"/>
+                <a16:creationId xmlns:a16="http://schemas.microsoft.com/office/drawing/2014/main" id="{40BCAA39-CED9-D043-9957-1414528EEAE7}"/>
               </a:ext>
             </a:extLst>
           </p:cNvPr>
@@ -3388,7 +3388,7 @@
     </p:spTree>
     <p:extLst>
       <p:ext uri="{BB962C8B-B14F-4D97-AF65-F5344CB8AC3E}">
-        <p14:creationId xmlns:p14="http://schemas.microsoft.com/office/powerpoint/2010/main" val="3735002877"/>
+        <p14:creationId xmlns:p14="http://schemas.microsoft.com/office/powerpoint/2010/main" val="2879000203"/>
       </p:ext>
     </p:extLst>
   </p:cSld>

--- a/tools/FreeP.RenderCompare/corpus/03-mixed-text.pptx
+++ b/tools/FreeP.RenderCompare/corpus/03-mixed-text.pptx
@@ -129,7 +129,7 @@
           <p:cNvPr id="2" name="Title 1">
             <a:extLst>
               <a:ext uri="{FF2B5EF4-FFF2-40B4-BE49-F238E27FC236}">
-                <a16:creationId xmlns:a16="http://schemas.microsoft.com/office/drawing/2014/main" id="{6EF81B7B-5041-0BB7-88F0-B80F42F1AA7B}"/>
+                <a16:creationId xmlns:a16="http://schemas.microsoft.com/office/drawing/2014/main" id="{5B96FF26-0137-9656-6507-764599C51097}"/>
               </a:ext>
             </a:extLst>
           </p:cNvPr>
@@ -166,7 +166,7 @@
           <p:cNvPr id="3" name="Subtitle 2">
             <a:extLst>
               <a:ext uri="{FF2B5EF4-FFF2-40B4-BE49-F238E27FC236}">
-                <a16:creationId xmlns:a16="http://schemas.microsoft.com/office/drawing/2014/main" id="{3BE2020F-6E80-79C1-8958-E9F4A11E232F}"/>
+                <a16:creationId xmlns:a16="http://schemas.microsoft.com/office/drawing/2014/main" id="{42A57ACB-13F1-665F-587D-AF583F01A81C}"/>
               </a:ext>
             </a:extLst>
           </p:cNvPr>
@@ -236,7 +236,7 @@
           <p:cNvPr id="4" name="Date Placeholder 3">
             <a:extLst>
               <a:ext uri="{FF2B5EF4-FFF2-40B4-BE49-F238E27FC236}">
-                <a16:creationId xmlns:a16="http://schemas.microsoft.com/office/drawing/2014/main" id="{3A21F302-7894-59D1-6757-63D9C437284A}"/>
+                <a16:creationId xmlns:a16="http://schemas.microsoft.com/office/drawing/2014/main" id="{8BF50D8A-DF01-FD97-D87F-697D056315AA}"/>
               </a:ext>
             </a:extLst>
           </p:cNvPr>
@@ -252,7 +252,7 @@
           <a:bodyPr/>
           <a:lstStyle/>
           <a:p>
-            <a:fld id="{D94B95D7-4A4B-4A15-A50F-2E9AB618FB15}" type="datetimeFigureOut">
+            <a:fld id="{1C7D97E8-F6DA-474E-94AD-0B1DB82ECF2E}" type="datetimeFigureOut">
               <a:rPr lang="en-US" smtClean="0"/>
               <a:t>6/25/2026</a:t>
             </a:fld>
@@ -265,7 +265,7 @@
           <p:cNvPr id="5" name="Footer Placeholder 4">
             <a:extLst>
               <a:ext uri="{FF2B5EF4-FFF2-40B4-BE49-F238E27FC236}">
-                <a16:creationId xmlns:a16="http://schemas.microsoft.com/office/drawing/2014/main" id="{C775EFA8-5005-F72D-8823-F563780C60A0}"/>
+                <a16:creationId xmlns:a16="http://schemas.microsoft.com/office/drawing/2014/main" id="{D1DB7A09-8B7B-1E63-806C-2B0A71C8D90E}"/>
               </a:ext>
             </a:extLst>
           </p:cNvPr>
@@ -290,7 +290,7 @@
           <p:cNvPr id="6" name="Slide Number Placeholder 5">
             <a:extLst>
               <a:ext uri="{FF2B5EF4-FFF2-40B4-BE49-F238E27FC236}">
-                <a16:creationId xmlns:a16="http://schemas.microsoft.com/office/drawing/2014/main" id="{A90DA546-1383-D479-B8F9-07A1E1CA769C}"/>
+                <a16:creationId xmlns:a16="http://schemas.microsoft.com/office/drawing/2014/main" id="{EB883677-1861-6C0B-BBEF-6E061EEBC1A3}"/>
               </a:ext>
             </a:extLst>
           </p:cNvPr>
@@ -306,7 +306,7 @@
           <a:bodyPr/>
           <a:lstStyle/>
           <a:p>
-            <a:fld id="{3CE3ACC0-AFC4-411B-8425-8A48D90929E1}" type="slidenum">
+            <a:fld id="{D9495CC1-9556-4C76-B880-013C244C7314}" type="slidenum">
               <a:rPr lang="en-US" smtClean="0"/>
               <a:t>‹#›</a:t>
             </a:fld>
@@ -317,7 +317,7 @@
     </p:spTree>
     <p:extLst>
       <p:ext uri="{BB962C8B-B14F-4D97-AF65-F5344CB8AC3E}">
-        <p14:creationId xmlns:p14="http://schemas.microsoft.com/office/powerpoint/2010/main" val="1446924625"/>
+        <p14:creationId xmlns:p14="http://schemas.microsoft.com/office/powerpoint/2010/main" val="3877321178"/>
       </p:ext>
     </p:extLst>
   </p:cSld>
@@ -349,7 +349,7 @@
           <p:cNvPr id="2" name="Title 1">
             <a:extLst>
               <a:ext uri="{FF2B5EF4-FFF2-40B4-BE49-F238E27FC236}">
-                <a16:creationId xmlns:a16="http://schemas.microsoft.com/office/drawing/2014/main" id="{C2A6CF2B-36DD-7789-AE54-AFA826C02970}"/>
+                <a16:creationId xmlns:a16="http://schemas.microsoft.com/office/drawing/2014/main" id="{C04ECA29-1C01-5985-4284-BD46996A7CEE}"/>
               </a:ext>
             </a:extLst>
           </p:cNvPr>
@@ -377,7 +377,7 @@
           <p:cNvPr id="3" name="Vertical Text Placeholder 2">
             <a:extLst>
               <a:ext uri="{FF2B5EF4-FFF2-40B4-BE49-F238E27FC236}">
-                <a16:creationId xmlns:a16="http://schemas.microsoft.com/office/drawing/2014/main" id="{F693EC01-D007-AC4D-55FC-FF497DB007BE}"/>
+                <a16:creationId xmlns:a16="http://schemas.microsoft.com/office/drawing/2014/main" id="{91D2664C-5437-46EA-793E-0C1F70B1F12B}"/>
               </a:ext>
             </a:extLst>
           </p:cNvPr>
@@ -434,7 +434,7 @@
           <p:cNvPr id="4" name="Date Placeholder 3">
             <a:extLst>
               <a:ext uri="{FF2B5EF4-FFF2-40B4-BE49-F238E27FC236}">
-                <a16:creationId xmlns:a16="http://schemas.microsoft.com/office/drawing/2014/main" id="{92E4344F-BDF5-1ACD-6A4C-A9EAB847FC52}"/>
+                <a16:creationId xmlns:a16="http://schemas.microsoft.com/office/drawing/2014/main" id="{560BA7AB-E876-6FFC-BD7C-838D599CBD3D}"/>
               </a:ext>
             </a:extLst>
           </p:cNvPr>
@@ -450,7 +450,7 @@
           <a:bodyPr/>
           <a:lstStyle/>
           <a:p>
-            <a:fld id="{D94B95D7-4A4B-4A15-A50F-2E9AB618FB15}" type="datetimeFigureOut">
+            <a:fld id="{1C7D97E8-F6DA-474E-94AD-0B1DB82ECF2E}" type="datetimeFigureOut">
               <a:rPr lang="en-US" smtClean="0"/>
               <a:t>6/25/2026</a:t>
             </a:fld>
@@ -463,7 +463,7 @@
           <p:cNvPr id="5" name="Footer Placeholder 4">
             <a:extLst>
               <a:ext uri="{FF2B5EF4-FFF2-40B4-BE49-F238E27FC236}">
-                <a16:creationId xmlns:a16="http://schemas.microsoft.com/office/drawing/2014/main" id="{01F9CB66-CC8B-B0CF-BB30-0912C4411890}"/>
+                <a16:creationId xmlns:a16="http://schemas.microsoft.com/office/drawing/2014/main" id="{75A86A0B-ADC2-6868-F56D-D9EC70D5E3DC}"/>
               </a:ext>
             </a:extLst>
           </p:cNvPr>
@@ -488,7 +488,7 @@
           <p:cNvPr id="6" name="Slide Number Placeholder 5">
             <a:extLst>
               <a:ext uri="{FF2B5EF4-FFF2-40B4-BE49-F238E27FC236}">
-                <a16:creationId xmlns:a16="http://schemas.microsoft.com/office/drawing/2014/main" id="{46F7016D-208A-E558-17EA-5FF1EEF1F76A}"/>
+                <a16:creationId xmlns:a16="http://schemas.microsoft.com/office/drawing/2014/main" id="{F9E1834E-6DB0-3F2A-E003-9932B4EF7FDB}"/>
               </a:ext>
             </a:extLst>
           </p:cNvPr>
@@ -504,7 +504,7 @@
           <a:bodyPr/>
           <a:lstStyle/>
           <a:p>
-            <a:fld id="{3CE3ACC0-AFC4-411B-8425-8A48D90929E1}" type="slidenum">
+            <a:fld id="{D9495CC1-9556-4C76-B880-013C244C7314}" type="slidenum">
               <a:rPr lang="en-US" smtClean="0"/>
               <a:t>‹#›</a:t>
             </a:fld>
@@ -515,7 +515,7 @@
     </p:spTree>
     <p:extLst>
       <p:ext uri="{BB962C8B-B14F-4D97-AF65-F5344CB8AC3E}">
-        <p14:creationId xmlns:p14="http://schemas.microsoft.com/office/powerpoint/2010/main" val="3165187049"/>
+        <p14:creationId xmlns:p14="http://schemas.microsoft.com/office/powerpoint/2010/main" val="2679330201"/>
       </p:ext>
     </p:extLst>
   </p:cSld>
@@ -547,7 +547,7 @@
           <p:cNvPr id="2" name="Vertical Title 1">
             <a:extLst>
               <a:ext uri="{FF2B5EF4-FFF2-40B4-BE49-F238E27FC236}">
-                <a16:creationId xmlns:a16="http://schemas.microsoft.com/office/drawing/2014/main" id="{16090AF2-39B5-60E9-A7A2-575688E85211}"/>
+                <a16:creationId xmlns:a16="http://schemas.microsoft.com/office/drawing/2014/main" id="{95467DCD-0290-975B-714F-C9BBE129F895}"/>
               </a:ext>
             </a:extLst>
           </p:cNvPr>
@@ -580,7 +580,7 @@
           <p:cNvPr id="3" name="Vertical Text Placeholder 2">
             <a:extLst>
               <a:ext uri="{FF2B5EF4-FFF2-40B4-BE49-F238E27FC236}">
-                <a16:creationId xmlns:a16="http://schemas.microsoft.com/office/drawing/2014/main" id="{CD49A460-D22B-DCD8-F08E-D1D03731363D}"/>
+                <a16:creationId xmlns:a16="http://schemas.microsoft.com/office/drawing/2014/main" id="{074EF95B-480B-659D-8F98-FD438E99E08F}"/>
               </a:ext>
             </a:extLst>
           </p:cNvPr>
@@ -642,7 +642,7 @@
           <p:cNvPr id="4" name="Date Placeholder 3">
             <a:extLst>
               <a:ext uri="{FF2B5EF4-FFF2-40B4-BE49-F238E27FC236}">
-                <a16:creationId xmlns:a16="http://schemas.microsoft.com/office/drawing/2014/main" id="{9358311A-7AF8-8916-0787-6C8AC8BA2864}"/>
+                <a16:creationId xmlns:a16="http://schemas.microsoft.com/office/drawing/2014/main" id="{5BD492CA-80E0-1695-5B5A-14CB1B8A0DAE}"/>
               </a:ext>
             </a:extLst>
           </p:cNvPr>
@@ -658,7 +658,7 @@
           <a:bodyPr/>
           <a:lstStyle/>
           <a:p>
-            <a:fld id="{D94B95D7-4A4B-4A15-A50F-2E9AB618FB15}" type="datetimeFigureOut">
+            <a:fld id="{1C7D97E8-F6DA-474E-94AD-0B1DB82ECF2E}" type="datetimeFigureOut">
               <a:rPr lang="en-US" smtClean="0"/>
               <a:t>6/25/2026</a:t>
             </a:fld>
@@ -671,7 +671,7 @@
           <p:cNvPr id="5" name="Footer Placeholder 4">
             <a:extLst>
               <a:ext uri="{FF2B5EF4-FFF2-40B4-BE49-F238E27FC236}">
-                <a16:creationId xmlns:a16="http://schemas.microsoft.com/office/drawing/2014/main" id="{8F2A353C-993D-2894-24F1-57940B705BB8}"/>
+                <a16:creationId xmlns:a16="http://schemas.microsoft.com/office/drawing/2014/main" id="{637B78C2-8317-C5CD-AC8F-A9953DBB89A5}"/>
               </a:ext>
             </a:extLst>
           </p:cNvPr>
@@ -696,7 +696,7 @@
           <p:cNvPr id="6" name="Slide Number Placeholder 5">
             <a:extLst>
               <a:ext uri="{FF2B5EF4-FFF2-40B4-BE49-F238E27FC236}">
-                <a16:creationId xmlns:a16="http://schemas.microsoft.com/office/drawing/2014/main" id="{B01EE3ED-9F0B-46FD-E5F6-6D11A08ED781}"/>
+                <a16:creationId xmlns:a16="http://schemas.microsoft.com/office/drawing/2014/main" id="{779B95D2-A3EE-36FA-E5AC-E556F53C2432}"/>
               </a:ext>
             </a:extLst>
           </p:cNvPr>
@@ -712,7 +712,7 @@
           <a:bodyPr/>
           <a:lstStyle/>
           <a:p>
-            <a:fld id="{3CE3ACC0-AFC4-411B-8425-8A48D90929E1}" type="slidenum">
+            <a:fld id="{D9495CC1-9556-4C76-B880-013C244C7314}" type="slidenum">
               <a:rPr lang="en-US" smtClean="0"/>
               <a:t>‹#›</a:t>
             </a:fld>
@@ -723,7 +723,7 @@
     </p:spTree>
     <p:extLst>
       <p:ext uri="{BB962C8B-B14F-4D97-AF65-F5344CB8AC3E}">
-        <p14:creationId xmlns:p14="http://schemas.microsoft.com/office/powerpoint/2010/main" val="1439956070"/>
+        <p14:creationId xmlns:p14="http://schemas.microsoft.com/office/powerpoint/2010/main" val="449255126"/>
       </p:ext>
     </p:extLst>
   </p:cSld>
@@ -755,7 +755,7 @@
           <p:cNvPr id="2" name="Title 1">
             <a:extLst>
               <a:ext uri="{FF2B5EF4-FFF2-40B4-BE49-F238E27FC236}">
-                <a16:creationId xmlns:a16="http://schemas.microsoft.com/office/drawing/2014/main" id="{0DEFA143-9BB8-B177-81F5-7A526507C17A}"/>
+                <a16:creationId xmlns:a16="http://schemas.microsoft.com/office/drawing/2014/main" id="{C6A49AF5-B2E6-0844-3B15-1139E9E82B08}"/>
               </a:ext>
             </a:extLst>
           </p:cNvPr>
@@ -783,7 +783,7 @@
           <p:cNvPr id="3" name="Content Placeholder 2">
             <a:extLst>
               <a:ext uri="{FF2B5EF4-FFF2-40B4-BE49-F238E27FC236}">
-                <a16:creationId xmlns:a16="http://schemas.microsoft.com/office/drawing/2014/main" id="{5E1973E3-8560-B6B9-649F-6D07F035A5E5}"/>
+                <a16:creationId xmlns:a16="http://schemas.microsoft.com/office/drawing/2014/main" id="{DC643921-E39E-D33A-E240-177ABA3294FE}"/>
               </a:ext>
             </a:extLst>
           </p:cNvPr>
@@ -840,7 +840,7 @@
           <p:cNvPr id="4" name="Date Placeholder 3">
             <a:extLst>
               <a:ext uri="{FF2B5EF4-FFF2-40B4-BE49-F238E27FC236}">
-                <a16:creationId xmlns:a16="http://schemas.microsoft.com/office/drawing/2014/main" id="{E5211117-884E-585D-FC0F-2B3F48B92BCF}"/>
+                <a16:creationId xmlns:a16="http://schemas.microsoft.com/office/drawing/2014/main" id="{76495423-E92F-557A-45A9-9E31BD8D1449}"/>
               </a:ext>
             </a:extLst>
           </p:cNvPr>
@@ -856,7 +856,7 @@
           <a:bodyPr/>
           <a:lstStyle/>
           <a:p>
-            <a:fld id="{D94B95D7-4A4B-4A15-A50F-2E9AB618FB15}" type="datetimeFigureOut">
+            <a:fld id="{1C7D97E8-F6DA-474E-94AD-0B1DB82ECF2E}" type="datetimeFigureOut">
               <a:rPr lang="en-US" smtClean="0"/>
               <a:t>6/25/2026</a:t>
             </a:fld>
@@ -869,7 +869,7 @@
           <p:cNvPr id="5" name="Footer Placeholder 4">
             <a:extLst>
               <a:ext uri="{FF2B5EF4-FFF2-40B4-BE49-F238E27FC236}">
-                <a16:creationId xmlns:a16="http://schemas.microsoft.com/office/drawing/2014/main" id="{06AB94D4-D7C2-6164-7621-5331245BC5A2}"/>
+                <a16:creationId xmlns:a16="http://schemas.microsoft.com/office/drawing/2014/main" id="{07AB5AA9-DD69-7AB7-E7AF-AAF637DB8767}"/>
               </a:ext>
             </a:extLst>
           </p:cNvPr>
@@ -894,7 +894,7 @@
           <p:cNvPr id="6" name="Slide Number Placeholder 5">
             <a:extLst>
               <a:ext uri="{FF2B5EF4-FFF2-40B4-BE49-F238E27FC236}">
-                <a16:creationId xmlns:a16="http://schemas.microsoft.com/office/drawing/2014/main" id="{115CC35F-7722-ED75-B031-2780751E19E2}"/>
+                <a16:creationId xmlns:a16="http://schemas.microsoft.com/office/drawing/2014/main" id="{6B38D49C-9A22-8ECF-D79C-C0D9115E63D5}"/>
               </a:ext>
             </a:extLst>
           </p:cNvPr>
@@ -910,7 +910,7 @@
           <a:bodyPr/>
           <a:lstStyle/>
           <a:p>
-            <a:fld id="{3CE3ACC0-AFC4-411B-8425-8A48D90929E1}" type="slidenum">
+            <a:fld id="{D9495CC1-9556-4C76-B880-013C244C7314}" type="slidenum">
               <a:rPr lang="en-US" smtClean="0"/>
               <a:t>‹#›</a:t>
             </a:fld>
@@ -921,7 +921,7 @@
     </p:spTree>
     <p:extLst>
       <p:ext uri="{BB962C8B-B14F-4D97-AF65-F5344CB8AC3E}">
-        <p14:creationId xmlns:p14="http://schemas.microsoft.com/office/powerpoint/2010/main" val="2112841373"/>
+        <p14:creationId xmlns:p14="http://schemas.microsoft.com/office/powerpoint/2010/main" val="3162461499"/>
       </p:ext>
     </p:extLst>
   </p:cSld>
@@ -953,7 +953,7 @@
           <p:cNvPr id="2" name="Title 1">
             <a:extLst>
               <a:ext uri="{FF2B5EF4-FFF2-40B4-BE49-F238E27FC236}">
-                <a16:creationId xmlns:a16="http://schemas.microsoft.com/office/drawing/2014/main" id="{6F1AA40D-4F56-C442-15C2-CAC3783A60D3}"/>
+                <a16:creationId xmlns:a16="http://schemas.microsoft.com/office/drawing/2014/main" id="{F836A649-B677-AFAB-06F0-77BB5E9FB8DE}"/>
               </a:ext>
             </a:extLst>
           </p:cNvPr>
@@ -990,7 +990,7 @@
           <p:cNvPr id="3" name="Text Placeholder 2">
             <a:extLst>
               <a:ext uri="{FF2B5EF4-FFF2-40B4-BE49-F238E27FC236}">
-                <a16:creationId xmlns:a16="http://schemas.microsoft.com/office/drawing/2014/main" id="{CEF8235F-2178-C7E1-023A-A493BC4C1240}"/>
+                <a16:creationId xmlns:a16="http://schemas.microsoft.com/office/drawing/2014/main" id="{4D483252-EB26-B31F-3098-E6A784F7139D}"/>
               </a:ext>
             </a:extLst>
           </p:cNvPr>
@@ -1115,7 +1115,7 @@
           <p:cNvPr id="4" name="Date Placeholder 3">
             <a:extLst>
               <a:ext uri="{FF2B5EF4-FFF2-40B4-BE49-F238E27FC236}">
-                <a16:creationId xmlns:a16="http://schemas.microsoft.com/office/drawing/2014/main" id="{242ACE32-59EF-D58D-2913-D92EA9B085CE}"/>
+                <a16:creationId xmlns:a16="http://schemas.microsoft.com/office/drawing/2014/main" id="{F3E91F71-E8F3-4C3C-15A5-EFD951D060CF}"/>
               </a:ext>
             </a:extLst>
           </p:cNvPr>
@@ -1131,7 +1131,7 @@
           <a:bodyPr/>
           <a:lstStyle/>
           <a:p>
-            <a:fld id="{D94B95D7-4A4B-4A15-A50F-2E9AB618FB15}" type="datetimeFigureOut">
+            <a:fld id="{1C7D97E8-F6DA-474E-94AD-0B1DB82ECF2E}" type="datetimeFigureOut">
               <a:rPr lang="en-US" smtClean="0"/>
               <a:t>6/25/2026</a:t>
             </a:fld>
@@ -1144,7 +1144,7 @@
           <p:cNvPr id="5" name="Footer Placeholder 4">
             <a:extLst>
               <a:ext uri="{FF2B5EF4-FFF2-40B4-BE49-F238E27FC236}">
-                <a16:creationId xmlns:a16="http://schemas.microsoft.com/office/drawing/2014/main" id="{67127A95-714D-3AC0-BFDE-CCC4E32284D4}"/>
+                <a16:creationId xmlns:a16="http://schemas.microsoft.com/office/drawing/2014/main" id="{7630CB9F-845D-0865-6B8F-2A19267FE79B}"/>
               </a:ext>
             </a:extLst>
           </p:cNvPr>
@@ -1169,7 +1169,7 @@
           <p:cNvPr id="6" name="Slide Number Placeholder 5">
             <a:extLst>
               <a:ext uri="{FF2B5EF4-FFF2-40B4-BE49-F238E27FC236}">
-                <a16:creationId xmlns:a16="http://schemas.microsoft.com/office/drawing/2014/main" id="{4F897552-817C-8C12-C9FB-5C194291C690}"/>
+                <a16:creationId xmlns:a16="http://schemas.microsoft.com/office/drawing/2014/main" id="{3A29D634-CE8E-51CC-ADA9-03770A66EB55}"/>
               </a:ext>
             </a:extLst>
           </p:cNvPr>
@@ -1185,7 +1185,7 @@
           <a:bodyPr/>
           <a:lstStyle/>
           <a:p>
-            <a:fld id="{3CE3ACC0-AFC4-411B-8425-8A48D90929E1}" type="slidenum">
+            <a:fld id="{D9495CC1-9556-4C76-B880-013C244C7314}" type="slidenum">
               <a:rPr lang="en-US" smtClean="0"/>
               <a:t>‹#›</a:t>
             </a:fld>
@@ -1196,7 +1196,7 @@
     </p:spTree>
     <p:extLst>
       <p:ext uri="{BB962C8B-B14F-4D97-AF65-F5344CB8AC3E}">
-        <p14:creationId xmlns:p14="http://schemas.microsoft.com/office/powerpoint/2010/main" val="1626390503"/>
+        <p14:creationId xmlns:p14="http://schemas.microsoft.com/office/powerpoint/2010/main" val="1877921253"/>
       </p:ext>
     </p:extLst>
   </p:cSld>
@@ -1228,7 +1228,7 @@
           <p:cNvPr id="2" name="Title 1">
             <a:extLst>
               <a:ext uri="{FF2B5EF4-FFF2-40B4-BE49-F238E27FC236}">
-                <a16:creationId xmlns:a16="http://schemas.microsoft.com/office/drawing/2014/main" id="{6FE523D6-9E4C-DD34-C784-4E6CDDC667F2}"/>
+                <a16:creationId xmlns:a16="http://schemas.microsoft.com/office/drawing/2014/main" id="{07873B20-BFDF-7333-0264-4853E925D131}"/>
               </a:ext>
             </a:extLst>
           </p:cNvPr>
@@ -1256,7 +1256,7 @@
           <p:cNvPr id="3" name="Content Placeholder 2">
             <a:extLst>
               <a:ext uri="{FF2B5EF4-FFF2-40B4-BE49-F238E27FC236}">
-                <a16:creationId xmlns:a16="http://schemas.microsoft.com/office/drawing/2014/main" id="{F3908777-6287-C106-C5C6-394334127E96}"/>
+                <a16:creationId xmlns:a16="http://schemas.microsoft.com/office/drawing/2014/main" id="{0DD0099D-5F85-BA26-79F3-3F4845725E8C}"/>
               </a:ext>
             </a:extLst>
           </p:cNvPr>
@@ -1318,7 +1318,7 @@
           <p:cNvPr id="4" name="Content Placeholder 3">
             <a:extLst>
               <a:ext uri="{FF2B5EF4-FFF2-40B4-BE49-F238E27FC236}">
-                <a16:creationId xmlns:a16="http://schemas.microsoft.com/office/drawing/2014/main" id="{EC00DDF2-FAB1-3BDF-CF15-F0898C06BAD6}"/>
+                <a16:creationId xmlns:a16="http://schemas.microsoft.com/office/drawing/2014/main" id="{137570CB-7CB9-95BF-1C7A-3D9ECD9A9DFD}"/>
               </a:ext>
             </a:extLst>
           </p:cNvPr>
@@ -1380,7 +1380,7 @@
           <p:cNvPr id="5" name="Date Placeholder 4">
             <a:extLst>
               <a:ext uri="{FF2B5EF4-FFF2-40B4-BE49-F238E27FC236}">
-                <a16:creationId xmlns:a16="http://schemas.microsoft.com/office/drawing/2014/main" id="{6500506C-8FB9-DC6B-FE80-CF4D0C99D391}"/>
+                <a16:creationId xmlns:a16="http://schemas.microsoft.com/office/drawing/2014/main" id="{1BE694D4-5E17-CBA5-6625-BE0ACC2D58A8}"/>
               </a:ext>
             </a:extLst>
           </p:cNvPr>
@@ -1396,7 +1396,7 @@
           <a:bodyPr/>
           <a:lstStyle/>
           <a:p>
-            <a:fld id="{D94B95D7-4A4B-4A15-A50F-2E9AB618FB15}" type="datetimeFigureOut">
+            <a:fld id="{1C7D97E8-F6DA-474E-94AD-0B1DB82ECF2E}" type="datetimeFigureOut">
               <a:rPr lang="en-US" smtClean="0"/>
               <a:t>6/25/2026</a:t>
             </a:fld>
@@ -1409,7 +1409,7 @@
           <p:cNvPr id="6" name="Footer Placeholder 5">
             <a:extLst>
               <a:ext uri="{FF2B5EF4-FFF2-40B4-BE49-F238E27FC236}">
-                <a16:creationId xmlns:a16="http://schemas.microsoft.com/office/drawing/2014/main" id="{9A3A363E-D270-07D6-9371-891390647C5C}"/>
+                <a16:creationId xmlns:a16="http://schemas.microsoft.com/office/drawing/2014/main" id="{5C6DEF0A-29F5-DADF-EECD-5456E2F5A6C6}"/>
               </a:ext>
             </a:extLst>
           </p:cNvPr>
@@ -1434,7 +1434,7 @@
           <p:cNvPr id="7" name="Slide Number Placeholder 6">
             <a:extLst>
               <a:ext uri="{FF2B5EF4-FFF2-40B4-BE49-F238E27FC236}">
-                <a16:creationId xmlns:a16="http://schemas.microsoft.com/office/drawing/2014/main" id="{EF842CB8-9EAF-12A8-51A3-A7C0F6C45CF9}"/>
+                <a16:creationId xmlns:a16="http://schemas.microsoft.com/office/drawing/2014/main" id="{2C62DA06-ABC6-4EF4-B55B-75B32F588445}"/>
               </a:ext>
             </a:extLst>
           </p:cNvPr>
@@ -1450,7 +1450,7 @@
           <a:bodyPr/>
           <a:lstStyle/>
           <a:p>
-            <a:fld id="{3CE3ACC0-AFC4-411B-8425-8A48D90929E1}" type="slidenum">
+            <a:fld id="{D9495CC1-9556-4C76-B880-013C244C7314}" type="slidenum">
               <a:rPr lang="en-US" smtClean="0"/>
               <a:t>‹#›</a:t>
             </a:fld>
@@ -1461,7 +1461,7 @@
     </p:spTree>
     <p:extLst>
       <p:ext uri="{BB962C8B-B14F-4D97-AF65-F5344CB8AC3E}">
-        <p14:creationId xmlns:p14="http://schemas.microsoft.com/office/powerpoint/2010/main" val="2320754401"/>
+        <p14:creationId xmlns:p14="http://schemas.microsoft.com/office/powerpoint/2010/main" val="2659025175"/>
       </p:ext>
     </p:extLst>
   </p:cSld>
@@ -1493,7 +1493,7 @@
           <p:cNvPr id="2" name="Title 1">
             <a:extLst>
               <a:ext uri="{FF2B5EF4-FFF2-40B4-BE49-F238E27FC236}">
-                <a16:creationId xmlns:a16="http://schemas.microsoft.com/office/drawing/2014/main" id="{7A19D0CB-0E19-0408-D1A3-0BA19803361C}"/>
+                <a16:creationId xmlns:a16="http://schemas.microsoft.com/office/drawing/2014/main" id="{8E99656D-B2F2-8EC6-2F91-96DD698CA517}"/>
               </a:ext>
             </a:extLst>
           </p:cNvPr>
@@ -1526,7 +1526,7 @@
           <p:cNvPr id="3" name="Text Placeholder 2">
             <a:extLst>
               <a:ext uri="{FF2B5EF4-FFF2-40B4-BE49-F238E27FC236}">
-                <a16:creationId xmlns:a16="http://schemas.microsoft.com/office/drawing/2014/main" id="{223C4666-1B38-54A2-67F4-7577EE2DB15E}"/>
+                <a16:creationId xmlns:a16="http://schemas.microsoft.com/office/drawing/2014/main" id="{3327D166-9AFF-8A7B-B11D-0FCA996B9192}"/>
               </a:ext>
             </a:extLst>
           </p:cNvPr>
@@ -1597,7 +1597,7 @@
           <p:cNvPr id="4" name="Content Placeholder 3">
             <a:extLst>
               <a:ext uri="{FF2B5EF4-FFF2-40B4-BE49-F238E27FC236}">
-                <a16:creationId xmlns:a16="http://schemas.microsoft.com/office/drawing/2014/main" id="{6F250AB9-1D1F-A8A3-4EF1-7F5FCACC7634}"/>
+                <a16:creationId xmlns:a16="http://schemas.microsoft.com/office/drawing/2014/main" id="{39CF7AD9-0A1E-D702-37EC-6C6A28ABAF17}"/>
               </a:ext>
             </a:extLst>
           </p:cNvPr>
@@ -1659,7 +1659,7 @@
           <p:cNvPr id="5" name="Text Placeholder 4">
             <a:extLst>
               <a:ext uri="{FF2B5EF4-FFF2-40B4-BE49-F238E27FC236}">
-                <a16:creationId xmlns:a16="http://schemas.microsoft.com/office/drawing/2014/main" id="{CC13E6C6-EE43-5379-C38C-D4BD7BFEC789}"/>
+                <a16:creationId xmlns:a16="http://schemas.microsoft.com/office/drawing/2014/main" id="{C3C21281-FC93-59D8-6DE2-3E60EE120846}"/>
               </a:ext>
             </a:extLst>
           </p:cNvPr>
@@ -1730,7 +1730,7 @@
           <p:cNvPr id="6" name="Content Placeholder 5">
             <a:extLst>
               <a:ext uri="{FF2B5EF4-FFF2-40B4-BE49-F238E27FC236}">
-                <a16:creationId xmlns:a16="http://schemas.microsoft.com/office/drawing/2014/main" id="{395E2866-0D88-8EBC-2CD3-D22825C489F2}"/>
+                <a16:creationId xmlns:a16="http://schemas.microsoft.com/office/drawing/2014/main" id="{C19ACC7E-472D-2DAB-C38E-4A379A53ACF5}"/>
               </a:ext>
             </a:extLst>
           </p:cNvPr>
@@ -1792,7 +1792,7 @@
           <p:cNvPr id="7" name="Date Placeholder 6">
             <a:extLst>
               <a:ext uri="{FF2B5EF4-FFF2-40B4-BE49-F238E27FC236}">
-                <a16:creationId xmlns:a16="http://schemas.microsoft.com/office/drawing/2014/main" id="{4B9B9516-9968-2F97-0ABE-B94680B2D3C1}"/>
+                <a16:creationId xmlns:a16="http://schemas.microsoft.com/office/drawing/2014/main" id="{F7476530-43DB-2B9B-C863-642872C4B34B}"/>
               </a:ext>
             </a:extLst>
           </p:cNvPr>
@@ -1808,7 +1808,7 @@
           <a:bodyPr/>
           <a:lstStyle/>
           <a:p>
-            <a:fld id="{D94B95D7-4A4B-4A15-A50F-2E9AB618FB15}" type="datetimeFigureOut">
+            <a:fld id="{1C7D97E8-F6DA-474E-94AD-0B1DB82ECF2E}" type="datetimeFigureOut">
               <a:rPr lang="en-US" smtClean="0"/>
               <a:t>6/25/2026</a:t>
             </a:fld>
@@ -1821,7 +1821,7 @@
           <p:cNvPr id="8" name="Footer Placeholder 7">
             <a:extLst>
               <a:ext uri="{FF2B5EF4-FFF2-40B4-BE49-F238E27FC236}">
-                <a16:creationId xmlns:a16="http://schemas.microsoft.com/office/drawing/2014/main" id="{F2089ED2-B8F8-D6E0-34ED-7B14F20D70F5}"/>
+                <a16:creationId xmlns:a16="http://schemas.microsoft.com/office/drawing/2014/main" id="{FB162C9C-5E6C-450A-B4E2-2D9FA6494B68}"/>
               </a:ext>
             </a:extLst>
           </p:cNvPr>
@@ -1846,7 +1846,7 @@
           <p:cNvPr id="9" name="Slide Number Placeholder 8">
             <a:extLst>
               <a:ext uri="{FF2B5EF4-FFF2-40B4-BE49-F238E27FC236}">
-                <a16:creationId xmlns:a16="http://schemas.microsoft.com/office/drawing/2014/main" id="{A1A9ADE3-D138-17C8-CDB9-5567862A6438}"/>
+                <a16:creationId xmlns:a16="http://schemas.microsoft.com/office/drawing/2014/main" id="{6EA5193D-C2E4-74C8-6DBA-12FFA7098481}"/>
               </a:ext>
             </a:extLst>
           </p:cNvPr>
@@ -1862,7 +1862,7 @@
           <a:bodyPr/>
           <a:lstStyle/>
           <a:p>
-            <a:fld id="{3CE3ACC0-AFC4-411B-8425-8A48D90929E1}" type="slidenum">
+            <a:fld id="{D9495CC1-9556-4C76-B880-013C244C7314}" type="slidenum">
               <a:rPr lang="en-US" smtClean="0"/>
               <a:t>‹#›</a:t>
             </a:fld>
@@ -1873,7 +1873,7 @@
     </p:spTree>
     <p:extLst>
       <p:ext uri="{BB962C8B-B14F-4D97-AF65-F5344CB8AC3E}">
-        <p14:creationId xmlns:p14="http://schemas.microsoft.com/office/powerpoint/2010/main" val="3846634296"/>
+        <p14:creationId xmlns:p14="http://schemas.microsoft.com/office/powerpoint/2010/main" val="2631940097"/>
       </p:ext>
     </p:extLst>
   </p:cSld>
@@ -1905,7 +1905,7 @@
           <p:cNvPr id="2" name="Title 1">
             <a:extLst>
               <a:ext uri="{FF2B5EF4-FFF2-40B4-BE49-F238E27FC236}">
-                <a16:creationId xmlns:a16="http://schemas.microsoft.com/office/drawing/2014/main" id="{2019E142-E728-BAFE-212B-3D3678AD08A1}"/>
+                <a16:creationId xmlns:a16="http://schemas.microsoft.com/office/drawing/2014/main" id="{3B3156EE-9DA1-033A-6209-BB2A40543A8D}"/>
               </a:ext>
             </a:extLst>
           </p:cNvPr>
@@ -1933,7 +1933,7 @@
           <p:cNvPr id="3" name="Date Placeholder 2">
             <a:extLst>
               <a:ext uri="{FF2B5EF4-FFF2-40B4-BE49-F238E27FC236}">
-                <a16:creationId xmlns:a16="http://schemas.microsoft.com/office/drawing/2014/main" id="{711EC7D6-B38A-6DFF-3D0C-14B9748C5644}"/>
+                <a16:creationId xmlns:a16="http://schemas.microsoft.com/office/drawing/2014/main" id="{5C827B89-AAE0-9193-6BF2-3650E99FDD93}"/>
               </a:ext>
             </a:extLst>
           </p:cNvPr>
@@ -1949,7 +1949,7 @@
           <a:bodyPr/>
           <a:lstStyle/>
           <a:p>
-            <a:fld id="{D94B95D7-4A4B-4A15-A50F-2E9AB618FB15}" type="datetimeFigureOut">
+            <a:fld id="{1C7D97E8-F6DA-474E-94AD-0B1DB82ECF2E}" type="datetimeFigureOut">
               <a:rPr lang="en-US" smtClean="0"/>
               <a:t>6/25/2026</a:t>
             </a:fld>
@@ -1962,7 +1962,7 @@
           <p:cNvPr id="4" name="Footer Placeholder 3">
             <a:extLst>
               <a:ext uri="{FF2B5EF4-FFF2-40B4-BE49-F238E27FC236}">
-                <a16:creationId xmlns:a16="http://schemas.microsoft.com/office/drawing/2014/main" id="{96A07EFC-5ACE-ECC8-833A-267535CBD714}"/>
+                <a16:creationId xmlns:a16="http://schemas.microsoft.com/office/drawing/2014/main" id="{5B9DF522-3950-A1FE-306B-DFBD16E5BF9C}"/>
               </a:ext>
             </a:extLst>
           </p:cNvPr>
@@ -1987,7 +1987,7 @@
           <p:cNvPr id="5" name="Slide Number Placeholder 4">
             <a:extLst>
               <a:ext uri="{FF2B5EF4-FFF2-40B4-BE49-F238E27FC236}">
-                <a16:creationId xmlns:a16="http://schemas.microsoft.com/office/drawing/2014/main" id="{1DAF5446-99BD-4C81-2D9A-B5DCF535C7E1}"/>
+                <a16:creationId xmlns:a16="http://schemas.microsoft.com/office/drawing/2014/main" id="{6C962E72-9C40-8EDB-5822-1692076878B7}"/>
               </a:ext>
             </a:extLst>
           </p:cNvPr>
@@ -2003,7 +2003,7 @@
           <a:bodyPr/>
           <a:lstStyle/>
           <a:p>
-            <a:fld id="{3CE3ACC0-AFC4-411B-8425-8A48D90929E1}" type="slidenum">
+            <a:fld id="{D9495CC1-9556-4C76-B880-013C244C7314}" type="slidenum">
               <a:rPr lang="en-US" smtClean="0"/>
               <a:t>‹#›</a:t>
             </a:fld>
@@ -2014,7 +2014,7 @@
     </p:spTree>
     <p:extLst>
       <p:ext uri="{BB962C8B-B14F-4D97-AF65-F5344CB8AC3E}">
-        <p14:creationId xmlns:p14="http://schemas.microsoft.com/office/powerpoint/2010/main" val="2971724000"/>
+        <p14:creationId xmlns:p14="http://schemas.microsoft.com/office/powerpoint/2010/main" val="2292768392"/>
       </p:ext>
     </p:extLst>
   </p:cSld>
@@ -2046,7 +2046,7 @@
           <p:cNvPr id="2" name="Date Placeholder 1">
             <a:extLst>
               <a:ext uri="{FF2B5EF4-FFF2-40B4-BE49-F238E27FC236}">
-                <a16:creationId xmlns:a16="http://schemas.microsoft.com/office/drawing/2014/main" id="{0978357C-C994-C975-6DA6-9F497CE5069F}"/>
+                <a16:creationId xmlns:a16="http://schemas.microsoft.com/office/drawing/2014/main" id="{36B739F4-E3DD-6A2E-8C0B-7CB96786E315}"/>
               </a:ext>
             </a:extLst>
           </p:cNvPr>
@@ -2062,7 +2062,7 @@
           <a:bodyPr/>
           <a:lstStyle/>
           <a:p>
-            <a:fld id="{D94B95D7-4A4B-4A15-A50F-2E9AB618FB15}" type="datetimeFigureOut">
+            <a:fld id="{1C7D97E8-F6DA-474E-94AD-0B1DB82ECF2E}" type="datetimeFigureOut">
               <a:rPr lang="en-US" smtClean="0"/>
               <a:t>6/25/2026</a:t>
             </a:fld>
@@ -2075,7 +2075,7 @@
           <p:cNvPr id="3" name="Footer Placeholder 2">
             <a:extLst>
               <a:ext uri="{FF2B5EF4-FFF2-40B4-BE49-F238E27FC236}">
-                <a16:creationId xmlns:a16="http://schemas.microsoft.com/office/drawing/2014/main" id="{1C78C61C-AD3D-9D0E-92E5-98B9B63F136D}"/>
+                <a16:creationId xmlns:a16="http://schemas.microsoft.com/office/drawing/2014/main" id="{8812BCDA-86B0-A063-CA0A-BC0AC9D762EB}"/>
               </a:ext>
             </a:extLst>
           </p:cNvPr>
@@ -2100,7 +2100,7 @@
           <p:cNvPr id="4" name="Slide Number Placeholder 3">
             <a:extLst>
               <a:ext uri="{FF2B5EF4-FFF2-40B4-BE49-F238E27FC236}">
-                <a16:creationId xmlns:a16="http://schemas.microsoft.com/office/drawing/2014/main" id="{D0D292DC-799F-1A2C-1874-7EAD0C1AD449}"/>
+                <a16:creationId xmlns:a16="http://schemas.microsoft.com/office/drawing/2014/main" id="{28D7E276-80AA-BC84-F7F5-8554062F9E81}"/>
               </a:ext>
             </a:extLst>
           </p:cNvPr>
@@ -2116,7 +2116,7 @@
           <a:bodyPr/>
           <a:lstStyle/>
           <a:p>
-            <a:fld id="{3CE3ACC0-AFC4-411B-8425-8A48D90929E1}" type="slidenum">
+            <a:fld id="{D9495CC1-9556-4C76-B880-013C244C7314}" type="slidenum">
               <a:rPr lang="en-US" smtClean="0"/>
               <a:t>‹#›</a:t>
             </a:fld>
@@ -2127,7 +2127,7 @@
     </p:spTree>
     <p:extLst>
       <p:ext uri="{BB962C8B-B14F-4D97-AF65-F5344CB8AC3E}">
-        <p14:creationId xmlns:p14="http://schemas.microsoft.com/office/powerpoint/2010/main" val="4075131522"/>
+        <p14:creationId xmlns:p14="http://schemas.microsoft.com/office/powerpoint/2010/main" val="3264185227"/>
       </p:ext>
     </p:extLst>
   </p:cSld>
@@ -2159,7 +2159,7 @@
           <p:cNvPr id="2" name="Title 1">
             <a:extLst>
               <a:ext uri="{FF2B5EF4-FFF2-40B4-BE49-F238E27FC236}">
-                <a16:creationId xmlns:a16="http://schemas.microsoft.com/office/drawing/2014/main" id="{C744ABC0-E074-D3EE-0D47-8CDA6EFA62F7}"/>
+                <a16:creationId xmlns:a16="http://schemas.microsoft.com/office/drawing/2014/main" id="{DE80BC1F-61D7-53E2-A285-1A202BA8F1B0}"/>
               </a:ext>
             </a:extLst>
           </p:cNvPr>
@@ -2196,7 +2196,7 @@
           <p:cNvPr id="3" name="Content Placeholder 2">
             <a:extLst>
               <a:ext uri="{FF2B5EF4-FFF2-40B4-BE49-F238E27FC236}">
-                <a16:creationId xmlns:a16="http://schemas.microsoft.com/office/drawing/2014/main" id="{7C2C5EB9-9911-CBED-8228-B420AA12E077}"/>
+                <a16:creationId xmlns:a16="http://schemas.microsoft.com/office/drawing/2014/main" id="{367DD9E0-2577-1A2B-6F60-D345967EC861}"/>
               </a:ext>
             </a:extLst>
           </p:cNvPr>
@@ -2286,7 +2286,7 @@
           <p:cNvPr id="4" name="Text Placeholder 3">
             <a:extLst>
               <a:ext uri="{FF2B5EF4-FFF2-40B4-BE49-F238E27FC236}">
-                <a16:creationId xmlns:a16="http://schemas.microsoft.com/office/drawing/2014/main" id="{1CCF7222-88BB-FE03-05DC-8105A2E0EF9F}"/>
+                <a16:creationId xmlns:a16="http://schemas.microsoft.com/office/drawing/2014/main" id="{7B89C766-1996-9AAF-52F5-CD301D01ED45}"/>
               </a:ext>
             </a:extLst>
           </p:cNvPr>
@@ -2357,7 +2357,7 @@
           <p:cNvPr id="5" name="Date Placeholder 4">
             <a:extLst>
               <a:ext uri="{FF2B5EF4-FFF2-40B4-BE49-F238E27FC236}">
-                <a16:creationId xmlns:a16="http://schemas.microsoft.com/office/drawing/2014/main" id="{55175114-DF80-893C-6529-48763F051595}"/>
+                <a16:creationId xmlns:a16="http://schemas.microsoft.com/office/drawing/2014/main" id="{27214B1A-298F-F862-3D74-D5BC186BB4CF}"/>
               </a:ext>
             </a:extLst>
           </p:cNvPr>
@@ -2373,7 +2373,7 @@
           <a:bodyPr/>
           <a:lstStyle/>
           <a:p>
-            <a:fld id="{D94B95D7-4A4B-4A15-A50F-2E9AB618FB15}" type="datetimeFigureOut">
+            <a:fld id="{1C7D97E8-F6DA-474E-94AD-0B1DB82ECF2E}" type="datetimeFigureOut">
               <a:rPr lang="en-US" smtClean="0"/>
               <a:t>6/25/2026</a:t>
             </a:fld>
@@ -2386,7 +2386,7 @@
           <p:cNvPr id="6" name="Footer Placeholder 5">
             <a:extLst>
               <a:ext uri="{FF2B5EF4-FFF2-40B4-BE49-F238E27FC236}">
-                <a16:creationId xmlns:a16="http://schemas.microsoft.com/office/drawing/2014/main" id="{6DF4DC5E-ACC5-2B11-A5CB-B1E07515EE6B}"/>
+                <a16:creationId xmlns:a16="http://schemas.microsoft.com/office/drawing/2014/main" id="{D1EDC4CC-41D9-03B4-DB5B-EF3258EDA47E}"/>
               </a:ext>
             </a:extLst>
           </p:cNvPr>
@@ -2411,7 +2411,7 @@
           <p:cNvPr id="7" name="Slide Number Placeholder 6">
             <a:extLst>
               <a:ext uri="{FF2B5EF4-FFF2-40B4-BE49-F238E27FC236}">
-                <a16:creationId xmlns:a16="http://schemas.microsoft.com/office/drawing/2014/main" id="{B0F180B7-DD1A-1122-4149-B8535002B7A7}"/>
+                <a16:creationId xmlns:a16="http://schemas.microsoft.com/office/drawing/2014/main" id="{1C858C66-0541-D05C-D56F-7E88D5E09F64}"/>
               </a:ext>
             </a:extLst>
           </p:cNvPr>
@@ -2427,7 +2427,7 @@
           <a:bodyPr/>
           <a:lstStyle/>
           <a:p>
-            <a:fld id="{3CE3ACC0-AFC4-411B-8425-8A48D90929E1}" type="slidenum">
+            <a:fld id="{D9495CC1-9556-4C76-B880-013C244C7314}" type="slidenum">
               <a:rPr lang="en-US" smtClean="0"/>
               <a:t>‹#›</a:t>
             </a:fld>
@@ -2438,7 +2438,7 @@
     </p:spTree>
     <p:extLst>
       <p:ext uri="{BB962C8B-B14F-4D97-AF65-F5344CB8AC3E}">
-        <p14:creationId xmlns:p14="http://schemas.microsoft.com/office/powerpoint/2010/main" val="3633282510"/>
+        <p14:creationId xmlns:p14="http://schemas.microsoft.com/office/powerpoint/2010/main" val="3475674301"/>
       </p:ext>
     </p:extLst>
   </p:cSld>
@@ -2470,7 +2470,7 @@
           <p:cNvPr id="2" name="Title 1">
             <a:extLst>
               <a:ext uri="{FF2B5EF4-FFF2-40B4-BE49-F238E27FC236}">
-                <a16:creationId xmlns:a16="http://schemas.microsoft.com/office/drawing/2014/main" id="{49873983-9D75-EF8B-7774-9A0F4DCE67DF}"/>
+                <a16:creationId xmlns:a16="http://schemas.microsoft.com/office/drawing/2014/main" id="{21EA7E6A-DB07-39DD-2568-E55C746E3875}"/>
               </a:ext>
             </a:extLst>
           </p:cNvPr>
@@ -2507,7 +2507,7 @@
           <p:cNvPr id="3" name="Picture Placeholder 2">
             <a:extLst>
               <a:ext uri="{FF2B5EF4-FFF2-40B4-BE49-F238E27FC236}">
-                <a16:creationId xmlns:a16="http://schemas.microsoft.com/office/drawing/2014/main" id="{4F6A5A49-E1D0-3731-F2CE-97EDE4FC8298}"/>
+                <a16:creationId xmlns:a16="http://schemas.microsoft.com/office/drawing/2014/main" id="{67B93326-1AAE-E473-11AB-03465340C1D5}"/>
               </a:ext>
             </a:extLst>
           </p:cNvPr>
@@ -2574,7 +2574,7 @@
           <p:cNvPr id="4" name="Text Placeholder 3">
             <a:extLst>
               <a:ext uri="{FF2B5EF4-FFF2-40B4-BE49-F238E27FC236}">
-                <a16:creationId xmlns:a16="http://schemas.microsoft.com/office/drawing/2014/main" id="{7E232D90-7ECE-16BD-F628-6C1E7A740026}"/>
+                <a16:creationId xmlns:a16="http://schemas.microsoft.com/office/drawing/2014/main" id="{16106852-875D-9D14-E758-DA89C75D09C9}"/>
               </a:ext>
             </a:extLst>
           </p:cNvPr>
@@ -2645,7 +2645,7 @@
           <p:cNvPr id="5" name="Date Placeholder 4">
             <a:extLst>
               <a:ext uri="{FF2B5EF4-FFF2-40B4-BE49-F238E27FC236}">
-                <a16:creationId xmlns:a16="http://schemas.microsoft.com/office/drawing/2014/main" id="{AC5328A8-9689-4469-5A79-9090F6D9A4A9}"/>
+                <a16:creationId xmlns:a16="http://schemas.microsoft.com/office/drawing/2014/main" id="{85F9B9EB-845D-F2F7-6546-FF65C73534DB}"/>
               </a:ext>
             </a:extLst>
           </p:cNvPr>
@@ -2661,7 +2661,7 @@
           <a:bodyPr/>
           <a:lstStyle/>
           <a:p>
-            <a:fld id="{D94B95D7-4A4B-4A15-A50F-2E9AB618FB15}" type="datetimeFigureOut">
+            <a:fld id="{1C7D97E8-F6DA-474E-94AD-0B1DB82ECF2E}" type="datetimeFigureOut">
               <a:rPr lang="en-US" smtClean="0"/>
               <a:t>6/25/2026</a:t>
             </a:fld>
@@ -2674,7 +2674,7 @@
           <p:cNvPr id="6" name="Footer Placeholder 5">
             <a:extLst>
               <a:ext uri="{FF2B5EF4-FFF2-40B4-BE49-F238E27FC236}">
-                <a16:creationId xmlns:a16="http://schemas.microsoft.com/office/drawing/2014/main" id="{5FAB497C-6259-F502-D737-520B9B72F1B2}"/>
+                <a16:creationId xmlns:a16="http://schemas.microsoft.com/office/drawing/2014/main" id="{353B9352-69A1-B07C-46D5-979EEBF68918}"/>
               </a:ext>
             </a:extLst>
           </p:cNvPr>
@@ -2699,7 +2699,7 @@
           <p:cNvPr id="7" name="Slide Number Placeholder 6">
             <a:extLst>
               <a:ext uri="{FF2B5EF4-FFF2-40B4-BE49-F238E27FC236}">
-                <a16:creationId xmlns:a16="http://schemas.microsoft.com/office/drawing/2014/main" id="{55C39E9B-0BC9-DEC6-8354-FE6B7F96D7FA}"/>
+                <a16:creationId xmlns:a16="http://schemas.microsoft.com/office/drawing/2014/main" id="{37713D49-DD3E-7D24-BC12-C09830AECC71}"/>
               </a:ext>
             </a:extLst>
           </p:cNvPr>
@@ -2715,7 +2715,7 @@
           <a:bodyPr/>
           <a:lstStyle/>
           <a:p>
-            <a:fld id="{3CE3ACC0-AFC4-411B-8425-8A48D90929E1}" type="slidenum">
+            <a:fld id="{D9495CC1-9556-4C76-B880-013C244C7314}" type="slidenum">
               <a:rPr lang="en-US" smtClean="0"/>
               <a:t>‹#›</a:t>
             </a:fld>
@@ -2726,7 +2726,7 @@
     </p:spTree>
     <p:extLst>
       <p:ext uri="{BB962C8B-B14F-4D97-AF65-F5344CB8AC3E}">
-        <p14:creationId xmlns:p14="http://schemas.microsoft.com/office/powerpoint/2010/main" val="2669485099"/>
+        <p14:creationId xmlns:p14="http://schemas.microsoft.com/office/powerpoint/2010/main" val="1182132442"/>
       </p:ext>
     </p:extLst>
   </p:cSld>
@@ -2763,7 +2763,7 @@
           <p:cNvPr id="2" name="Title Placeholder 1">
             <a:extLst>
               <a:ext uri="{FF2B5EF4-FFF2-40B4-BE49-F238E27FC236}">
-                <a16:creationId xmlns:a16="http://schemas.microsoft.com/office/drawing/2014/main" id="{10FE0D1F-2F11-3B56-4325-BBF0B9E1305B}"/>
+                <a16:creationId xmlns:a16="http://schemas.microsoft.com/office/drawing/2014/main" id="{A36A918C-7AF3-171E-7D2A-783D2EF94BBA}"/>
               </a:ext>
             </a:extLst>
           </p:cNvPr>
@@ -2801,7 +2801,7 @@
           <p:cNvPr id="3" name="Text Placeholder 2">
             <a:extLst>
               <a:ext uri="{FF2B5EF4-FFF2-40B4-BE49-F238E27FC236}">
-                <a16:creationId xmlns:a16="http://schemas.microsoft.com/office/drawing/2014/main" id="{5D080059-71DF-453D-6D02-C667339E9798}"/>
+                <a16:creationId xmlns:a16="http://schemas.microsoft.com/office/drawing/2014/main" id="{EDA2A8EE-9E02-D0A4-2FC2-7B2D2C93BBE2}"/>
               </a:ext>
             </a:extLst>
           </p:cNvPr>
@@ -2868,7 +2868,7 @@
           <p:cNvPr id="4" name="Date Placeholder 3">
             <a:extLst>
               <a:ext uri="{FF2B5EF4-FFF2-40B4-BE49-F238E27FC236}">
-                <a16:creationId xmlns:a16="http://schemas.microsoft.com/office/drawing/2014/main" id="{F1BD2466-7777-C426-4D7B-E733DC110AED}"/>
+                <a16:creationId xmlns:a16="http://schemas.microsoft.com/office/drawing/2014/main" id="{61059CD5-3719-2273-D46C-347883250787}"/>
               </a:ext>
             </a:extLst>
           </p:cNvPr>
@@ -2902,7 +2902,7 @@
             </a:lvl1pPr>
           </a:lstStyle>
           <a:p>
-            <a:fld id="{D94B95D7-4A4B-4A15-A50F-2E9AB618FB15}" type="datetimeFigureOut">
+            <a:fld id="{1C7D97E8-F6DA-474E-94AD-0B1DB82ECF2E}" type="datetimeFigureOut">
               <a:rPr lang="en-US" smtClean="0"/>
               <a:t>6/25/2026</a:t>
             </a:fld>
@@ -2915,7 +2915,7 @@
           <p:cNvPr id="5" name="Footer Placeholder 4">
             <a:extLst>
               <a:ext uri="{FF2B5EF4-FFF2-40B4-BE49-F238E27FC236}">
-                <a16:creationId xmlns:a16="http://schemas.microsoft.com/office/drawing/2014/main" id="{E2ECDEC6-2984-9CF3-80FD-A26A9A34141A}"/>
+                <a16:creationId xmlns:a16="http://schemas.microsoft.com/office/drawing/2014/main" id="{B0FC32C0-3EC4-0635-EEBB-95D3464A921F}"/>
               </a:ext>
             </a:extLst>
           </p:cNvPr>
@@ -2958,7 +2958,7 @@
           <p:cNvPr id="6" name="Slide Number Placeholder 5">
             <a:extLst>
               <a:ext uri="{FF2B5EF4-FFF2-40B4-BE49-F238E27FC236}">
-                <a16:creationId xmlns:a16="http://schemas.microsoft.com/office/drawing/2014/main" id="{60892CDB-173D-01F1-9AB2-71A139390F16}"/>
+                <a16:creationId xmlns:a16="http://schemas.microsoft.com/office/drawing/2014/main" id="{93BC4E80-FA20-4637-3EDC-BE9810367657}"/>
               </a:ext>
             </a:extLst>
           </p:cNvPr>
@@ -2992,7 +2992,7 @@
             </a:lvl1pPr>
           </a:lstStyle>
           <a:p>
-            <a:fld id="{3CE3ACC0-AFC4-411B-8425-8A48D90929E1}" type="slidenum">
+            <a:fld id="{D9495CC1-9556-4C76-B880-013C244C7314}" type="slidenum">
               <a:rPr lang="en-US" smtClean="0"/>
               <a:t>‹#›</a:t>
             </a:fld>
@@ -3003,7 +3003,7 @@
     </p:spTree>
     <p:extLst>
       <p:ext uri="{BB962C8B-B14F-4D97-AF65-F5344CB8AC3E}">
-        <p14:creationId xmlns:p14="http://schemas.microsoft.com/office/powerpoint/2010/main" val="553048486"/>
+        <p14:creationId xmlns:p14="http://schemas.microsoft.com/office/powerpoint/2010/main" val="1095883951"/>
       </p:ext>
     </p:extLst>
   </p:cSld>
@@ -3326,7 +3326,7 @@
           <p:cNvPr id="2" name="TextBox 1">
             <a:extLst>
               <a:ext uri="{FF2B5EF4-FFF2-40B4-BE49-F238E27FC236}">
-                <a16:creationId xmlns:a16="http://schemas.microsoft.com/office/drawing/2014/main" id="{40BCAA39-CED9-D043-9957-1414528EEAE7}"/>
+                <a16:creationId xmlns:a16="http://schemas.microsoft.com/office/drawing/2014/main" id="{0D5AFCAF-C8E7-C26A-C2A5-8A0700391123}"/>
               </a:ext>
             </a:extLst>
           </p:cNvPr>
@@ -3388,7 +3388,7 @@
     </p:spTree>
     <p:extLst>
       <p:ext uri="{BB962C8B-B14F-4D97-AF65-F5344CB8AC3E}">
-        <p14:creationId xmlns:p14="http://schemas.microsoft.com/office/powerpoint/2010/main" val="2879000203"/>
+        <p14:creationId xmlns:p14="http://schemas.microsoft.com/office/powerpoint/2010/main" val="2369612303"/>
       </p:ext>
     </p:extLst>
   </p:cSld>

--- a/tools/FreeP.RenderCompare/corpus/03-mixed-text.pptx
+++ b/tools/FreeP.RenderCompare/corpus/03-mixed-text.pptx
@@ -129,7 +129,7 @@
           <p:cNvPr id="2" name="Title 1">
             <a:extLst>
               <a:ext uri="{FF2B5EF4-FFF2-40B4-BE49-F238E27FC236}">
-                <a16:creationId xmlns:a16="http://schemas.microsoft.com/office/drawing/2014/main" id="{5B96FF26-0137-9656-6507-764599C51097}"/>
+                <a16:creationId xmlns:a16="http://schemas.microsoft.com/office/drawing/2014/main" id="{7F4105E3-99BA-6C9E-829A-C5E49186DEFD}"/>
               </a:ext>
             </a:extLst>
           </p:cNvPr>
@@ -166,7 +166,7 @@
           <p:cNvPr id="3" name="Subtitle 2">
             <a:extLst>
               <a:ext uri="{FF2B5EF4-FFF2-40B4-BE49-F238E27FC236}">
-                <a16:creationId xmlns:a16="http://schemas.microsoft.com/office/drawing/2014/main" id="{42A57ACB-13F1-665F-587D-AF583F01A81C}"/>
+                <a16:creationId xmlns:a16="http://schemas.microsoft.com/office/drawing/2014/main" id="{B1A896F3-6DAA-4E40-D1C2-13EF46250C03}"/>
               </a:ext>
             </a:extLst>
           </p:cNvPr>
@@ -236,7 +236,7 @@
           <p:cNvPr id="4" name="Date Placeholder 3">
             <a:extLst>
               <a:ext uri="{FF2B5EF4-FFF2-40B4-BE49-F238E27FC236}">
-                <a16:creationId xmlns:a16="http://schemas.microsoft.com/office/drawing/2014/main" id="{8BF50D8A-DF01-FD97-D87F-697D056315AA}"/>
+                <a16:creationId xmlns:a16="http://schemas.microsoft.com/office/drawing/2014/main" id="{24011C2E-EDB8-57F0-FDEE-13781B1577E9}"/>
               </a:ext>
             </a:extLst>
           </p:cNvPr>
@@ -252,9 +252,9 @@
           <a:bodyPr/>
           <a:lstStyle/>
           <a:p>
-            <a:fld id="{1C7D97E8-F6DA-474E-94AD-0B1DB82ECF2E}" type="datetimeFigureOut">
+            <a:fld id="{8AB44B09-3F86-4311-B16C-FB8A1A86CE05}" type="datetimeFigureOut">
               <a:rPr lang="en-US" smtClean="0"/>
-              <a:t>6/25/2026</a:t>
+              <a:t>6/26/2026</a:t>
             </a:fld>
             <a:endParaRPr lang="en-US"/>
           </a:p>
@@ -265,7 +265,7 @@
           <p:cNvPr id="5" name="Footer Placeholder 4">
             <a:extLst>
               <a:ext uri="{FF2B5EF4-FFF2-40B4-BE49-F238E27FC236}">
-                <a16:creationId xmlns:a16="http://schemas.microsoft.com/office/drawing/2014/main" id="{D1DB7A09-8B7B-1E63-806C-2B0A71C8D90E}"/>
+                <a16:creationId xmlns:a16="http://schemas.microsoft.com/office/drawing/2014/main" id="{A6BCB4BE-59DC-AE45-1652-D8C055749E81}"/>
               </a:ext>
             </a:extLst>
           </p:cNvPr>
@@ -290,7 +290,7 @@
           <p:cNvPr id="6" name="Slide Number Placeholder 5">
             <a:extLst>
               <a:ext uri="{FF2B5EF4-FFF2-40B4-BE49-F238E27FC236}">
-                <a16:creationId xmlns:a16="http://schemas.microsoft.com/office/drawing/2014/main" id="{EB883677-1861-6C0B-BBEF-6E061EEBC1A3}"/>
+                <a16:creationId xmlns:a16="http://schemas.microsoft.com/office/drawing/2014/main" id="{8FC30D15-53EF-EE01-F77B-C40D990D535A}"/>
               </a:ext>
             </a:extLst>
           </p:cNvPr>
@@ -306,7 +306,7 @@
           <a:bodyPr/>
           <a:lstStyle/>
           <a:p>
-            <a:fld id="{D9495CC1-9556-4C76-B880-013C244C7314}" type="slidenum">
+            <a:fld id="{18CF658B-B8D9-4AB7-9284-A0572F664610}" type="slidenum">
               <a:rPr lang="en-US" smtClean="0"/>
               <a:t>‹#›</a:t>
             </a:fld>
@@ -317,7 +317,7 @@
     </p:spTree>
     <p:extLst>
       <p:ext uri="{BB962C8B-B14F-4D97-AF65-F5344CB8AC3E}">
-        <p14:creationId xmlns:p14="http://schemas.microsoft.com/office/powerpoint/2010/main" val="3877321178"/>
+        <p14:creationId xmlns:p14="http://schemas.microsoft.com/office/powerpoint/2010/main" val="590876068"/>
       </p:ext>
     </p:extLst>
   </p:cSld>
@@ -349,7 +349,7 @@
           <p:cNvPr id="2" name="Title 1">
             <a:extLst>
               <a:ext uri="{FF2B5EF4-FFF2-40B4-BE49-F238E27FC236}">
-                <a16:creationId xmlns:a16="http://schemas.microsoft.com/office/drawing/2014/main" id="{C04ECA29-1C01-5985-4284-BD46996A7CEE}"/>
+                <a16:creationId xmlns:a16="http://schemas.microsoft.com/office/drawing/2014/main" id="{B3C6AC33-4735-7C7F-E177-C59037FCA312}"/>
               </a:ext>
             </a:extLst>
           </p:cNvPr>
@@ -377,7 +377,7 @@
           <p:cNvPr id="3" name="Vertical Text Placeholder 2">
             <a:extLst>
               <a:ext uri="{FF2B5EF4-FFF2-40B4-BE49-F238E27FC236}">
-                <a16:creationId xmlns:a16="http://schemas.microsoft.com/office/drawing/2014/main" id="{91D2664C-5437-46EA-793E-0C1F70B1F12B}"/>
+                <a16:creationId xmlns:a16="http://schemas.microsoft.com/office/drawing/2014/main" id="{19DAA8DB-7A23-4DA5-67EB-DA1A64D91CD9}"/>
               </a:ext>
             </a:extLst>
           </p:cNvPr>
@@ -434,7 +434,7 @@
           <p:cNvPr id="4" name="Date Placeholder 3">
             <a:extLst>
               <a:ext uri="{FF2B5EF4-FFF2-40B4-BE49-F238E27FC236}">
-                <a16:creationId xmlns:a16="http://schemas.microsoft.com/office/drawing/2014/main" id="{560BA7AB-E876-6FFC-BD7C-838D599CBD3D}"/>
+                <a16:creationId xmlns:a16="http://schemas.microsoft.com/office/drawing/2014/main" id="{8B1F0FF9-E748-5557-600E-44B4BF147DF6}"/>
               </a:ext>
             </a:extLst>
           </p:cNvPr>
@@ -450,9 +450,9 @@
           <a:bodyPr/>
           <a:lstStyle/>
           <a:p>
-            <a:fld id="{1C7D97E8-F6DA-474E-94AD-0B1DB82ECF2E}" type="datetimeFigureOut">
+            <a:fld id="{8AB44B09-3F86-4311-B16C-FB8A1A86CE05}" type="datetimeFigureOut">
               <a:rPr lang="en-US" smtClean="0"/>
-              <a:t>6/25/2026</a:t>
+              <a:t>6/26/2026</a:t>
             </a:fld>
             <a:endParaRPr lang="en-US"/>
           </a:p>
@@ -463,7 +463,7 @@
           <p:cNvPr id="5" name="Footer Placeholder 4">
             <a:extLst>
               <a:ext uri="{FF2B5EF4-FFF2-40B4-BE49-F238E27FC236}">
-                <a16:creationId xmlns:a16="http://schemas.microsoft.com/office/drawing/2014/main" id="{75A86A0B-ADC2-6868-F56D-D9EC70D5E3DC}"/>
+                <a16:creationId xmlns:a16="http://schemas.microsoft.com/office/drawing/2014/main" id="{EBAB5BD5-EB70-4D21-0A21-5A740AFC7EF4}"/>
               </a:ext>
             </a:extLst>
           </p:cNvPr>
@@ -488,7 +488,7 @@
           <p:cNvPr id="6" name="Slide Number Placeholder 5">
             <a:extLst>
               <a:ext uri="{FF2B5EF4-FFF2-40B4-BE49-F238E27FC236}">
-                <a16:creationId xmlns:a16="http://schemas.microsoft.com/office/drawing/2014/main" id="{F9E1834E-6DB0-3F2A-E003-9932B4EF7FDB}"/>
+                <a16:creationId xmlns:a16="http://schemas.microsoft.com/office/drawing/2014/main" id="{B0CA3329-3671-365C-E7DD-0C22B1548AA5}"/>
               </a:ext>
             </a:extLst>
           </p:cNvPr>
@@ -504,7 +504,7 @@
           <a:bodyPr/>
           <a:lstStyle/>
           <a:p>
-            <a:fld id="{D9495CC1-9556-4C76-B880-013C244C7314}" type="slidenum">
+            <a:fld id="{18CF658B-B8D9-4AB7-9284-A0572F664610}" type="slidenum">
               <a:rPr lang="en-US" smtClean="0"/>
               <a:t>‹#›</a:t>
             </a:fld>
@@ -515,7 +515,7 @@
     </p:spTree>
     <p:extLst>
       <p:ext uri="{BB962C8B-B14F-4D97-AF65-F5344CB8AC3E}">
-        <p14:creationId xmlns:p14="http://schemas.microsoft.com/office/powerpoint/2010/main" val="2679330201"/>
+        <p14:creationId xmlns:p14="http://schemas.microsoft.com/office/powerpoint/2010/main" val="1811038153"/>
       </p:ext>
     </p:extLst>
   </p:cSld>
@@ -547,7 +547,7 @@
           <p:cNvPr id="2" name="Vertical Title 1">
             <a:extLst>
               <a:ext uri="{FF2B5EF4-FFF2-40B4-BE49-F238E27FC236}">
-                <a16:creationId xmlns:a16="http://schemas.microsoft.com/office/drawing/2014/main" id="{95467DCD-0290-975B-714F-C9BBE129F895}"/>
+                <a16:creationId xmlns:a16="http://schemas.microsoft.com/office/drawing/2014/main" id="{0FA15CCE-C476-3EF9-0E3C-B320EF81B723}"/>
               </a:ext>
             </a:extLst>
           </p:cNvPr>
@@ -580,7 +580,7 @@
           <p:cNvPr id="3" name="Vertical Text Placeholder 2">
             <a:extLst>
               <a:ext uri="{FF2B5EF4-FFF2-40B4-BE49-F238E27FC236}">
-                <a16:creationId xmlns:a16="http://schemas.microsoft.com/office/drawing/2014/main" id="{074EF95B-480B-659D-8F98-FD438E99E08F}"/>
+                <a16:creationId xmlns:a16="http://schemas.microsoft.com/office/drawing/2014/main" id="{245B9F6A-7D47-EC2F-E319-A0AA13C74D83}"/>
               </a:ext>
             </a:extLst>
           </p:cNvPr>
@@ -642,7 +642,7 @@
           <p:cNvPr id="4" name="Date Placeholder 3">
             <a:extLst>
               <a:ext uri="{FF2B5EF4-FFF2-40B4-BE49-F238E27FC236}">
-                <a16:creationId xmlns:a16="http://schemas.microsoft.com/office/drawing/2014/main" id="{5BD492CA-80E0-1695-5B5A-14CB1B8A0DAE}"/>
+                <a16:creationId xmlns:a16="http://schemas.microsoft.com/office/drawing/2014/main" id="{67E7E895-CC4A-FB50-3399-9283F24AEB21}"/>
               </a:ext>
             </a:extLst>
           </p:cNvPr>
@@ -658,9 +658,9 @@
           <a:bodyPr/>
           <a:lstStyle/>
           <a:p>
-            <a:fld id="{1C7D97E8-F6DA-474E-94AD-0B1DB82ECF2E}" type="datetimeFigureOut">
+            <a:fld id="{8AB44B09-3F86-4311-B16C-FB8A1A86CE05}" type="datetimeFigureOut">
               <a:rPr lang="en-US" smtClean="0"/>
-              <a:t>6/25/2026</a:t>
+              <a:t>6/26/2026</a:t>
             </a:fld>
             <a:endParaRPr lang="en-US"/>
           </a:p>
@@ -671,7 +671,7 @@
           <p:cNvPr id="5" name="Footer Placeholder 4">
             <a:extLst>
               <a:ext uri="{FF2B5EF4-FFF2-40B4-BE49-F238E27FC236}">
-                <a16:creationId xmlns:a16="http://schemas.microsoft.com/office/drawing/2014/main" id="{637B78C2-8317-C5CD-AC8F-A9953DBB89A5}"/>
+                <a16:creationId xmlns:a16="http://schemas.microsoft.com/office/drawing/2014/main" id="{E6963F55-C24D-C310-17E0-8505E89EB92A}"/>
               </a:ext>
             </a:extLst>
           </p:cNvPr>
@@ -696,7 +696,7 @@
           <p:cNvPr id="6" name="Slide Number Placeholder 5">
             <a:extLst>
               <a:ext uri="{FF2B5EF4-FFF2-40B4-BE49-F238E27FC236}">
-                <a16:creationId xmlns:a16="http://schemas.microsoft.com/office/drawing/2014/main" id="{779B95D2-A3EE-36FA-E5AC-E556F53C2432}"/>
+                <a16:creationId xmlns:a16="http://schemas.microsoft.com/office/drawing/2014/main" id="{AAF30A05-00EE-1804-5FF7-B1B267215899}"/>
               </a:ext>
             </a:extLst>
           </p:cNvPr>
@@ -712,7 +712,7 @@
           <a:bodyPr/>
           <a:lstStyle/>
           <a:p>
-            <a:fld id="{D9495CC1-9556-4C76-B880-013C244C7314}" type="slidenum">
+            <a:fld id="{18CF658B-B8D9-4AB7-9284-A0572F664610}" type="slidenum">
               <a:rPr lang="en-US" smtClean="0"/>
               <a:t>‹#›</a:t>
             </a:fld>
@@ -723,7 +723,7 @@
     </p:spTree>
     <p:extLst>
       <p:ext uri="{BB962C8B-B14F-4D97-AF65-F5344CB8AC3E}">
-        <p14:creationId xmlns:p14="http://schemas.microsoft.com/office/powerpoint/2010/main" val="449255126"/>
+        <p14:creationId xmlns:p14="http://schemas.microsoft.com/office/powerpoint/2010/main" val="4234010313"/>
       </p:ext>
     </p:extLst>
   </p:cSld>
@@ -755,7 +755,7 @@
           <p:cNvPr id="2" name="Title 1">
             <a:extLst>
               <a:ext uri="{FF2B5EF4-FFF2-40B4-BE49-F238E27FC236}">
-                <a16:creationId xmlns:a16="http://schemas.microsoft.com/office/drawing/2014/main" id="{C6A49AF5-B2E6-0844-3B15-1139E9E82B08}"/>
+                <a16:creationId xmlns:a16="http://schemas.microsoft.com/office/drawing/2014/main" id="{56A969B9-ADE5-457F-B9C4-DA5A4DDBBFED}"/>
               </a:ext>
             </a:extLst>
           </p:cNvPr>
@@ -783,7 +783,7 @@
           <p:cNvPr id="3" name="Content Placeholder 2">
             <a:extLst>
               <a:ext uri="{FF2B5EF4-FFF2-40B4-BE49-F238E27FC236}">
-                <a16:creationId xmlns:a16="http://schemas.microsoft.com/office/drawing/2014/main" id="{DC643921-E39E-D33A-E240-177ABA3294FE}"/>
+                <a16:creationId xmlns:a16="http://schemas.microsoft.com/office/drawing/2014/main" id="{86D14805-304D-915D-86D9-5D71FDBEEF6B}"/>
               </a:ext>
             </a:extLst>
           </p:cNvPr>
@@ -840,7 +840,7 @@
           <p:cNvPr id="4" name="Date Placeholder 3">
             <a:extLst>
               <a:ext uri="{FF2B5EF4-FFF2-40B4-BE49-F238E27FC236}">
-                <a16:creationId xmlns:a16="http://schemas.microsoft.com/office/drawing/2014/main" id="{76495423-E92F-557A-45A9-9E31BD8D1449}"/>
+                <a16:creationId xmlns:a16="http://schemas.microsoft.com/office/drawing/2014/main" id="{1ADC7485-7D4B-F482-6BFE-623C6A1C1C72}"/>
               </a:ext>
             </a:extLst>
           </p:cNvPr>
@@ -856,9 +856,9 @@
           <a:bodyPr/>
           <a:lstStyle/>
           <a:p>
-            <a:fld id="{1C7D97E8-F6DA-474E-94AD-0B1DB82ECF2E}" type="datetimeFigureOut">
+            <a:fld id="{8AB44B09-3F86-4311-B16C-FB8A1A86CE05}" type="datetimeFigureOut">
               <a:rPr lang="en-US" smtClean="0"/>
-              <a:t>6/25/2026</a:t>
+              <a:t>6/26/2026</a:t>
             </a:fld>
             <a:endParaRPr lang="en-US"/>
           </a:p>
@@ -869,7 +869,7 @@
           <p:cNvPr id="5" name="Footer Placeholder 4">
             <a:extLst>
               <a:ext uri="{FF2B5EF4-FFF2-40B4-BE49-F238E27FC236}">
-                <a16:creationId xmlns:a16="http://schemas.microsoft.com/office/drawing/2014/main" id="{07AB5AA9-DD69-7AB7-E7AF-AAF637DB8767}"/>
+                <a16:creationId xmlns:a16="http://schemas.microsoft.com/office/drawing/2014/main" id="{007E8524-CB14-E372-2381-46F342F655AF}"/>
               </a:ext>
             </a:extLst>
           </p:cNvPr>
@@ -894,7 +894,7 @@
           <p:cNvPr id="6" name="Slide Number Placeholder 5">
             <a:extLst>
               <a:ext uri="{FF2B5EF4-FFF2-40B4-BE49-F238E27FC236}">
-                <a16:creationId xmlns:a16="http://schemas.microsoft.com/office/drawing/2014/main" id="{6B38D49C-9A22-8ECF-D79C-C0D9115E63D5}"/>
+                <a16:creationId xmlns:a16="http://schemas.microsoft.com/office/drawing/2014/main" id="{3AC7D85A-BE44-A7C0-8666-DD805D37149D}"/>
               </a:ext>
             </a:extLst>
           </p:cNvPr>
@@ -910,7 +910,7 @@
           <a:bodyPr/>
           <a:lstStyle/>
           <a:p>
-            <a:fld id="{D9495CC1-9556-4C76-B880-013C244C7314}" type="slidenum">
+            <a:fld id="{18CF658B-B8D9-4AB7-9284-A0572F664610}" type="slidenum">
               <a:rPr lang="en-US" smtClean="0"/>
               <a:t>‹#›</a:t>
             </a:fld>
@@ -921,7 +921,7 @@
     </p:spTree>
     <p:extLst>
       <p:ext uri="{BB962C8B-B14F-4D97-AF65-F5344CB8AC3E}">
-        <p14:creationId xmlns:p14="http://schemas.microsoft.com/office/powerpoint/2010/main" val="3162461499"/>
+        <p14:creationId xmlns:p14="http://schemas.microsoft.com/office/powerpoint/2010/main" val="565026509"/>
       </p:ext>
     </p:extLst>
   </p:cSld>
@@ -953,7 +953,7 @@
           <p:cNvPr id="2" name="Title 1">
             <a:extLst>
               <a:ext uri="{FF2B5EF4-FFF2-40B4-BE49-F238E27FC236}">
-                <a16:creationId xmlns:a16="http://schemas.microsoft.com/office/drawing/2014/main" id="{F836A649-B677-AFAB-06F0-77BB5E9FB8DE}"/>
+                <a16:creationId xmlns:a16="http://schemas.microsoft.com/office/drawing/2014/main" id="{367203B1-9150-E579-B011-07285D2FF290}"/>
               </a:ext>
             </a:extLst>
           </p:cNvPr>
@@ -990,7 +990,7 @@
           <p:cNvPr id="3" name="Text Placeholder 2">
             <a:extLst>
               <a:ext uri="{FF2B5EF4-FFF2-40B4-BE49-F238E27FC236}">
-                <a16:creationId xmlns:a16="http://schemas.microsoft.com/office/drawing/2014/main" id="{4D483252-EB26-B31F-3098-E6A784F7139D}"/>
+                <a16:creationId xmlns:a16="http://schemas.microsoft.com/office/drawing/2014/main" id="{1C6012CC-2325-E400-AE62-2F72E99AF33C}"/>
               </a:ext>
             </a:extLst>
           </p:cNvPr>
@@ -1115,7 +1115,7 @@
           <p:cNvPr id="4" name="Date Placeholder 3">
             <a:extLst>
               <a:ext uri="{FF2B5EF4-FFF2-40B4-BE49-F238E27FC236}">
-                <a16:creationId xmlns:a16="http://schemas.microsoft.com/office/drawing/2014/main" id="{F3E91F71-E8F3-4C3C-15A5-EFD951D060CF}"/>
+                <a16:creationId xmlns:a16="http://schemas.microsoft.com/office/drawing/2014/main" id="{92DAF3E6-AE60-E740-BE73-F255358C9577}"/>
               </a:ext>
             </a:extLst>
           </p:cNvPr>
@@ -1131,9 +1131,9 @@
           <a:bodyPr/>
           <a:lstStyle/>
           <a:p>
-            <a:fld id="{1C7D97E8-F6DA-474E-94AD-0B1DB82ECF2E}" type="datetimeFigureOut">
+            <a:fld id="{8AB44B09-3F86-4311-B16C-FB8A1A86CE05}" type="datetimeFigureOut">
               <a:rPr lang="en-US" smtClean="0"/>
-              <a:t>6/25/2026</a:t>
+              <a:t>6/26/2026</a:t>
             </a:fld>
             <a:endParaRPr lang="en-US"/>
           </a:p>
@@ -1144,7 +1144,7 @@
           <p:cNvPr id="5" name="Footer Placeholder 4">
             <a:extLst>
               <a:ext uri="{FF2B5EF4-FFF2-40B4-BE49-F238E27FC236}">
-                <a16:creationId xmlns:a16="http://schemas.microsoft.com/office/drawing/2014/main" id="{7630CB9F-845D-0865-6B8F-2A19267FE79B}"/>
+                <a16:creationId xmlns:a16="http://schemas.microsoft.com/office/drawing/2014/main" id="{21F67C7D-8A4D-B6B0-817C-40795F3D911B}"/>
               </a:ext>
             </a:extLst>
           </p:cNvPr>
@@ -1169,7 +1169,7 @@
           <p:cNvPr id="6" name="Slide Number Placeholder 5">
             <a:extLst>
               <a:ext uri="{FF2B5EF4-FFF2-40B4-BE49-F238E27FC236}">
-                <a16:creationId xmlns:a16="http://schemas.microsoft.com/office/drawing/2014/main" id="{3A29D634-CE8E-51CC-ADA9-03770A66EB55}"/>
+                <a16:creationId xmlns:a16="http://schemas.microsoft.com/office/drawing/2014/main" id="{5738844F-0072-8B93-CE14-758C147EC078}"/>
               </a:ext>
             </a:extLst>
           </p:cNvPr>
@@ -1185,7 +1185,7 @@
           <a:bodyPr/>
           <a:lstStyle/>
           <a:p>
-            <a:fld id="{D9495CC1-9556-4C76-B880-013C244C7314}" type="slidenum">
+            <a:fld id="{18CF658B-B8D9-4AB7-9284-A0572F664610}" type="slidenum">
               <a:rPr lang="en-US" smtClean="0"/>
               <a:t>‹#›</a:t>
             </a:fld>
@@ -1196,7 +1196,7 @@
     </p:spTree>
     <p:extLst>
       <p:ext uri="{BB962C8B-B14F-4D97-AF65-F5344CB8AC3E}">
-        <p14:creationId xmlns:p14="http://schemas.microsoft.com/office/powerpoint/2010/main" val="1877921253"/>
+        <p14:creationId xmlns:p14="http://schemas.microsoft.com/office/powerpoint/2010/main" val="1303642950"/>
       </p:ext>
     </p:extLst>
   </p:cSld>
@@ -1228,7 +1228,7 @@
           <p:cNvPr id="2" name="Title 1">
             <a:extLst>
               <a:ext uri="{FF2B5EF4-FFF2-40B4-BE49-F238E27FC236}">
-                <a16:creationId xmlns:a16="http://schemas.microsoft.com/office/drawing/2014/main" id="{07873B20-BFDF-7333-0264-4853E925D131}"/>
+                <a16:creationId xmlns:a16="http://schemas.microsoft.com/office/drawing/2014/main" id="{462B8AC8-FD99-1807-22F8-39A74560B963}"/>
               </a:ext>
             </a:extLst>
           </p:cNvPr>
@@ -1256,7 +1256,7 @@
           <p:cNvPr id="3" name="Content Placeholder 2">
             <a:extLst>
               <a:ext uri="{FF2B5EF4-FFF2-40B4-BE49-F238E27FC236}">
-                <a16:creationId xmlns:a16="http://schemas.microsoft.com/office/drawing/2014/main" id="{0DD0099D-5F85-BA26-79F3-3F4845725E8C}"/>
+                <a16:creationId xmlns:a16="http://schemas.microsoft.com/office/drawing/2014/main" id="{74939BCE-168A-40DF-8079-5E3648BC56E1}"/>
               </a:ext>
             </a:extLst>
           </p:cNvPr>
@@ -1318,7 +1318,7 @@
           <p:cNvPr id="4" name="Content Placeholder 3">
             <a:extLst>
               <a:ext uri="{FF2B5EF4-FFF2-40B4-BE49-F238E27FC236}">
-                <a16:creationId xmlns:a16="http://schemas.microsoft.com/office/drawing/2014/main" id="{137570CB-7CB9-95BF-1C7A-3D9ECD9A9DFD}"/>
+                <a16:creationId xmlns:a16="http://schemas.microsoft.com/office/drawing/2014/main" id="{83E4F1C0-C94C-D033-1B21-8CA5AE7AA710}"/>
               </a:ext>
             </a:extLst>
           </p:cNvPr>
@@ -1380,7 +1380,7 @@
           <p:cNvPr id="5" name="Date Placeholder 4">
             <a:extLst>
               <a:ext uri="{FF2B5EF4-FFF2-40B4-BE49-F238E27FC236}">
-                <a16:creationId xmlns:a16="http://schemas.microsoft.com/office/drawing/2014/main" id="{1BE694D4-5E17-CBA5-6625-BE0ACC2D58A8}"/>
+                <a16:creationId xmlns:a16="http://schemas.microsoft.com/office/drawing/2014/main" id="{7E0A0F11-09D7-963A-31E0-B55B8B22A00D}"/>
               </a:ext>
             </a:extLst>
           </p:cNvPr>
@@ -1396,9 +1396,9 @@
           <a:bodyPr/>
           <a:lstStyle/>
           <a:p>
-            <a:fld id="{1C7D97E8-F6DA-474E-94AD-0B1DB82ECF2E}" type="datetimeFigureOut">
+            <a:fld id="{8AB44B09-3F86-4311-B16C-FB8A1A86CE05}" type="datetimeFigureOut">
               <a:rPr lang="en-US" smtClean="0"/>
-              <a:t>6/25/2026</a:t>
+              <a:t>6/26/2026</a:t>
             </a:fld>
             <a:endParaRPr lang="en-US"/>
           </a:p>
@@ -1409,7 +1409,7 @@
           <p:cNvPr id="6" name="Footer Placeholder 5">
             <a:extLst>
               <a:ext uri="{FF2B5EF4-FFF2-40B4-BE49-F238E27FC236}">
-                <a16:creationId xmlns:a16="http://schemas.microsoft.com/office/drawing/2014/main" id="{5C6DEF0A-29F5-DADF-EECD-5456E2F5A6C6}"/>
+                <a16:creationId xmlns:a16="http://schemas.microsoft.com/office/drawing/2014/main" id="{61FEA676-7309-FA78-613A-DEF514D169D2}"/>
               </a:ext>
             </a:extLst>
           </p:cNvPr>
@@ -1434,7 +1434,7 @@
           <p:cNvPr id="7" name="Slide Number Placeholder 6">
             <a:extLst>
               <a:ext uri="{FF2B5EF4-FFF2-40B4-BE49-F238E27FC236}">
-                <a16:creationId xmlns:a16="http://schemas.microsoft.com/office/drawing/2014/main" id="{2C62DA06-ABC6-4EF4-B55B-75B32F588445}"/>
+                <a16:creationId xmlns:a16="http://schemas.microsoft.com/office/drawing/2014/main" id="{5944ADC8-C005-E8BB-C626-88AA21E408DF}"/>
               </a:ext>
             </a:extLst>
           </p:cNvPr>
@@ -1450,7 +1450,7 @@
           <a:bodyPr/>
           <a:lstStyle/>
           <a:p>
-            <a:fld id="{D9495CC1-9556-4C76-B880-013C244C7314}" type="slidenum">
+            <a:fld id="{18CF658B-B8D9-4AB7-9284-A0572F664610}" type="slidenum">
               <a:rPr lang="en-US" smtClean="0"/>
               <a:t>‹#›</a:t>
             </a:fld>
@@ -1461,7 +1461,7 @@
     </p:spTree>
     <p:extLst>
       <p:ext uri="{BB962C8B-B14F-4D97-AF65-F5344CB8AC3E}">
-        <p14:creationId xmlns:p14="http://schemas.microsoft.com/office/powerpoint/2010/main" val="2659025175"/>
+        <p14:creationId xmlns:p14="http://schemas.microsoft.com/office/powerpoint/2010/main" val="945686500"/>
       </p:ext>
     </p:extLst>
   </p:cSld>
@@ -1493,7 +1493,7 @@
           <p:cNvPr id="2" name="Title 1">
             <a:extLst>
               <a:ext uri="{FF2B5EF4-FFF2-40B4-BE49-F238E27FC236}">
-                <a16:creationId xmlns:a16="http://schemas.microsoft.com/office/drawing/2014/main" id="{8E99656D-B2F2-8EC6-2F91-96DD698CA517}"/>
+                <a16:creationId xmlns:a16="http://schemas.microsoft.com/office/drawing/2014/main" id="{BD73A484-06D8-D589-BE01-F7233F4842F7}"/>
               </a:ext>
             </a:extLst>
           </p:cNvPr>
@@ -1526,7 +1526,7 @@
           <p:cNvPr id="3" name="Text Placeholder 2">
             <a:extLst>
               <a:ext uri="{FF2B5EF4-FFF2-40B4-BE49-F238E27FC236}">
-                <a16:creationId xmlns:a16="http://schemas.microsoft.com/office/drawing/2014/main" id="{3327D166-9AFF-8A7B-B11D-0FCA996B9192}"/>
+                <a16:creationId xmlns:a16="http://schemas.microsoft.com/office/drawing/2014/main" id="{C3CA0ED5-5E07-6A8C-595D-225A74F1B7E2}"/>
               </a:ext>
             </a:extLst>
           </p:cNvPr>
@@ -1597,7 +1597,7 @@
           <p:cNvPr id="4" name="Content Placeholder 3">
             <a:extLst>
               <a:ext uri="{FF2B5EF4-FFF2-40B4-BE49-F238E27FC236}">
-                <a16:creationId xmlns:a16="http://schemas.microsoft.com/office/drawing/2014/main" id="{39CF7AD9-0A1E-D702-37EC-6C6A28ABAF17}"/>
+                <a16:creationId xmlns:a16="http://schemas.microsoft.com/office/drawing/2014/main" id="{B283E86D-ADE9-1D2E-2726-CC75AFCC4096}"/>
               </a:ext>
             </a:extLst>
           </p:cNvPr>
@@ -1659,7 +1659,7 @@
           <p:cNvPr id="5" name="Text Placeholder 4">
             <a:extLst>
               <a:ext uri="{FF2B5EF4-FFF2-40B4-BE49-F238E27FC236}">
-                <a16:creationId xmlns:a16="http://schemas.microsoft.com/office/drawing/2014/main" id="{C3C21281-FC93-59D8-6DE2-3E60EE120846}"/>
+                <a16:creationId xmlns:a16="http://schemas.microsoft.com/office/drawing/2014/main" id="{40EE86FB-9855-4AC9-148A-A21C2933CADA}"/>
               </a:ext>
             </a:extLst>
           </p:cNvPr>
@@ -1730,7 +1730,7 @@
           <p:cNvPr id="6" name="Content Placeholder 5">
             <a:extLst>
               <a:ext uri="{FF2B5EF4-FFF2-40B4-BE49-F238E27FC236}">
-                <a16:creationId xmlns:a16="http://schemas.microsoft.com/office/drawing/2014/main" id="{C19ACC7E-472D-2DAB-C38E-4A379A53ACF5}"/>
+                <a16:creationId xmlns:a16="http://schemas.microsoft.com/office/drawing/2014/main" id="{2302CDC5-50E5-26F4-25C5-332EDCE5DAE3}"/>
               </a:ext>
             </a:extLst>
           </p:cNvPr>
@@ -1792,7 +1792,7 @@
           <p:cNvPr id="7" name="Date Placeholder 6">
             <a:extLst>
               <a:ext uri="{FF2B5EF4-FFF2-40B4-BE49-F238E27FC236}">
-                <a16:creationId xmlns:a16="http://schemas.microsoft.com/office/drawing/2014/main" id="{F7476530-43DB-2B9B-C863-642872C4B34B}"/>
+                <a16:creationId xmlns:a16="http://schemas.microsoft.com/office/drawing/2014/main" id="{9FE75F43-37BF-D208-D311-BE72EB62539F}"/>
               </a:ext>
             </a:extLst>
           </p:cNvPr>
@@ -1808,9 +1808,9 @@
           <a:bodyPr/>
           <a:lstStyle/>
           <a:p>
-            <a:fld id="{1C7D97E8-F6DA-474E-94AD-0B1DB82ECF2E}" type="datetimeFigureOut">
+            <a:fld id="{8AB44B09-3F86-4311-B16C-FB8A1A86CE05}" type="datetimeFigureOut">
               <a:rPr lang="en-US" smtClean="0"/>
-              <a:t>6/25/2026</a:t>
+              <a:t>6/26/2026</a:t>
             </a:fld>
             <a:endParaRPr lang="en-US"/>
           </a:p>
@@ -1821,7 +1821,7 @@
           <p:cNvPr id="8" name="Footer Placeholder 7">
             <a:extLst>
               <a:ext uri="{FF2B5EF4-FFF2-40B4-BE49-F238E27FC236}">
-                <a16:creationId xmlns:a16="http://schemas.microsoft.com/office/drawing/2014/main" id="{FB162C9C-5E6C-450A-B4E2-2D9FA6494B68}"/>
+                <a16:creationId xmlns:a16="http://schemas.microsoft.com/office/drawing/2014/main" id="{649F925D-930E-92C3-BEE7-914E76A315B2}"/>
               </a:ext>
             </a:extLst>
           </p:cNvPr>
@@ -1846,7 +1846,7 @@
           <p:cNvPr id="9" name="Slide Number Placeholder 8">
             <a:extLst>
               <a:ext uri="{FF2B5EF4-FFF2-40B4-BE49-F238E27FC236}">
-                <a16:creationId xmlns:a16="http://schemas.microsoft.com/office/drawing/2014/main" id="{6EA5193D-C2E4-74C8-6DBA-12FFA7098481}"/>
+                <a16:creationId xmlns:a16="http://schemas.microsoft.com/office/drawing/2014/main" id="{932307F6-BF6A-06F3-9141-4A97848C3A01}"/>
               </a:ext>
             </a:extLst>
           </p:cNvPr>
@@ -1862,7 +1862,7 @@
           <a:bodyPr/>
           <a:lstStyle/>
           <a:p>
-            <a:fld id="{D9495CC1-9556-4C76-B880-013C244C7314}" type="slidenum">
+            <a:fld id="{18CF658B-B8D9-4AB7-9284-A0572F664610}" type="slidenum">
               <a:rPr lang="en-US" smtClean="0"/>
               <a:t>‹#›</a:t>
             </a:fld>
@@ -1873,7 +1873,7 @@
     </p:spTree>
     <p:extLst>
       <p:ext uri="{BB962C8B-B14F-4D97-AF65-F5344CB8AC3E}">
-        <p14:creationId xmlns:p14="http://schemas.microsoft.com/office/powerpoint/2010/main" val="2631940097"/>
+        <p14:creationId xmlns:p14="http://schemas.microsoft.com/office/powerpoint/2010/main" val="841991602"/>
       </p:ext>
     </p:extLst>
   </p:cSld>
@@ -1905,7 +1905,7 @@
           <p:cNvPr id="2" name="Title 1">
             <a:extLst>
               <a:ext uri="{FF2B5EF4-FFF2-40B4-BE49-F238E27FC236}">
-                <a16:creationId xmlns:a16="http://schemas.microsoft.com/office/drawing/2014/main" id="{3B3156EE-9DA1-033A-6209-BB2A40543A8D}"/>
+                <a16:creationId xmlns:a16="http://schemas.microsoft.com/office/drawing/2014/main" id="{F39F6570-7C90-188C-DAC2-F7D5519C3C4A}"/>
               </a:ext>
             </a:extLst>
           </p:cNvPr>
@@ -1933,7 +1933,7 @@
           <p:cNvPr id="3" name="Date Placeholder 2">
             <a:extLst>
               <a:ext uri="{FF2B5EF4-FFF2-40B4-BE49-F238E27FC236}">
-                <a16:creationId xmlns:a16="http://schemas.microsoft.com/office/drawing/2014/main" id="{5C827B89-AAE0-9193-6BF2-3650E99FDD93}"/>
+                <a16:creationId xmlns:a16="http://schemas.microsoft.com/office/drawing/2014/main" id="{33797A71-ECFA-1FE2-4DA9-44FEBAC201A7}"/>
               </a:ext>
             </a:extLst>
           </p:cNvPr>
@@ -1949,9 +1949,9 @@
           <a:bodyPr/>
           <a:lstStyle/>
           <a:p>
-            <a:fld id="{1C7D97E8-F6DA-474E-94AD-0B1DB82ECF2E}" type="datetimeFigureOut">
+            <a:fld id="{8AB44B09-3F86-4311-B16C-FB8A1A86CE05}" type="datetimeFigureOut">
               <a:rPr lang="en-US" smtClean="0"/>
-              <a:t>6/25/2026</a:t>
+              <a:t>6/26/2026</a:t>
             </a:fld>
             <a:endParaRPr lang="en-US"/>
           </a:p>
@@ -1962,7 +1962,7 @@
           <p:cNvPr id="4" name="Footer Placeholder 3">
             <a:extLst>
               <a:ext uri="{FF2B5EF4-FFF2-40B4-BE49-F238E27FC236}">
-                <a16:creationId xmlns:a16="http://schemas.microsoft.com/office/drawing/2014/main" id="{5B9DF522-3950-A1FE-306B-DFBD16E5BF9C}"/>
+                <a16:creationId xmlns:a16="http://schemas.microsoft.com/office/drawing/2014/main" id="{2810E27D-FBB2-AA2B-1267-23453AE01635}"/>
               </a:ext>
             </a:extLst>
           </p:cNvPr>
@@ -1987,7 +1987,7 @@
           <p:cNvPr id="5" name="Slide Number Placeholder 4">
             <a:extLst>
               <a:ext uri="{FF2B5EF4-FFF2-40B4-BE49-F238E27FC236}">
-                <a16:creationId xmlns:a16="http://schemas.microsoft.com/office/drawing/2014/main" id="{6C962E72-9C40-8EDB-5822-1692076878B7}"/>
+                <a16:creationId xmlns:a16="http://schemas.microsoft.com/office/drawing/2014/main" id="{02A837C5-3C71-9676-3E01-0FF2EA430EA8}"/>
               </a:ext>
             </a:extLst>
           </p:cNvPr>
@@ -2003,7 +2003,7 @@
           <a:bodyPr/>
           <a:lstStyle/>
           <a:p>
-            <a:fld id="{D9495CC1-9556-4C76-B880-013C244C7314}" type="slidenum">
+            <a:fld id="{18CF658B-B8D9-4AB7-9284-A0572F664610}" type="slidenum">
               <a:rPr lang="en-US" smtClean="0"/>
               <a:t>‹#›</a:t>
             </a:fld>
@@ -2014,7 +2014,7 @@
     </p:spTree>
     <p:extLst>
       <p:ext uri="{BB962C8B-B14F-4D97-AF65-F5344CB8AC3E}">
-        <p14:creationId xmlns:p14="http://schemas.microsoft.com/office/powerpoint/2010/main" val="2292768392"/>
+        <p14:creationId xmlns:p14="http://schemas.microsoft.com/office/powerpoint/2010/main" val="238824782"/>
       </p:ext>
     </p:extLst>
   </p:cSld>
@@ -2046,7 +2046,7 @@
           <p:cNvPr id="2" name="Date Placeholder 1">
             <a:extLst>
               <a:ext uri="{FF2B5EF4-FFF2-40B4-BE49-F238E27FC236}">
-                <a16:creationId xmlns:a16="http://schemas.microsoft.com/office/drawing/2014/main" id="{36B739F4-E3DD-6A2E-8C0B-7CB96786E315}"/>
+                <a16:creationId xmlns:a16="http://schemas.microsoft.com/office/drawing/2014/main" id="{67C04C8F-3F0C-449C-6B1D-00C42E5F4EDA}"/>
               </a:ext>
             </a:extLst>
           </p:cNvPr>
@@ -2062,9 +2062,9 @@
           <a:bodyPr/>
           <a:lstStyle/>
           <a:p>
-            <a:fld id="{1C7D97E8-F6DA-474E-94AD-0B1DB82ECF2E}" type="datetimeFigureOut">
+            <a:fld id="{8AB44B09-3F86-4311-B16C-FB8A1A86CE05}" type="datetimeFigureOut">
               <a:rPr lang="en-US" smtClean="0"/>
-              <a:t>6/25/2026</a:t>
+              <a:t>6/26/2026</a:t>
             </a:fld>
             <a:endParaRPr lang="en-US"/>
           </a:p>
@@ -2075,7 +2075,7 @@
           <p:cNvPr id="3" name="Footer Placeholder 2">
             <a:extLst>
               <a:ext uri="{FF2B5EF4-FFF2-40B4-BE49-F238E27FC236}">
-                <a16:creationId xmlns:a16="http://schemas.microsoft.com/office/drawing/2014/main" id="{8812BCDA-86B0-A063-CA0A-BC0AC9D762EB}"/>
+                <a16:creationId xmlns:a16="http://schemas.microsoft.com/office/drawing/2014/main" id="{6C0621C0-DC00-A20B-A5BE-2A60FEC5D1AE}"/>
               </a:ext>
             </a:extLst>
           </p:cNvPr>
@@ -2100,7 +2100,7 @@
           <p:cNvPr id="4" name="Slide Number Placeholder 3">
             <a:extLst>
               <a:ext uri="{FF2B5EF4-FFF2-40B4-BE49-F238E27FC236}">
-                <a16:creationId xmlns:a16="http://schemas.microsoft.com/office/drawing/2014/main" id="{28D7E276-80AA-BC84-F7F5-8554062F9E81}"/>
+                <a16:creationId xmlns:a16="http://schemas.microsoft.com/office/drawing/2014/main" id="{337B92B8-45F2-525D-7346-876B752E680F}"/>
               </a:ext>
             </a:extLst>
           </p:cNvPr>
@@ -2116,7 +2116,7 @@
           <a:bodyPr/>
           <a:lstStyle/>
           <a:p>
-            <a:fld id="{D9495CC1-9556-4C76-B880-013C244C7314}" type="slidenum">
+            <a:fld id="{18CF658B-B8D9-4AB7-9284-A0572F664610}" type="slidenum">
               <a:rPr lang="en-US" smtClean="0"/>
               <a:t>‹#›</a:t>
             </a:fld>
@@ -2127,7 +2127,7 @@
     </p:spTree>
     <p:extLst>
       <p:ext uri="{BB962C8B-B14F-4D97-AF65-F5344CB8AC3E}">
-        <p14:creationId xmlns:p14="http://schemas.microsoft.com/office/powerpoint/2010/main" val="3264185227"/>
+        <p14:creationId xmlns:p14="http://schemas.microsoft.com/office/powerpoint/2010/main" val="2881183572"/>
       </p:ext>
     </p:extLst>
   </p:cSld>
@@ -2159,7 +2159,7 @@
           <p:cNvPr id="2" name="Title 1">
             <a:extLst>
               <a:ext uri="{FF2B5EF4-FFF2-40B4-BE49-F238E27FC236}">
-                <a16:creationId xmlns:a16="http://schemas.microsoft.com/office/drawing/2014/main" id="{DE80BC1F-61D7-53E2-A285-1A202BA8F1B0}"/>
+                <a16:creationId xmlns:a16="http://schemas.microsoft.com/office/drawing/2014/main" id="{46CD712F-C8EC-7091-3384-36ED8F2FA196}"/>
               </a:ext>
             </a:extLst>
           </p:cNvPr>
@@ -2196,7 +2196,7 @@
           <p:cNvPr id="3" name="Content Placeholder 2">
             <a:extLst>
               <a:ext uri="{FF2B5EF4-FFF2-40B4-BE49-F238E27FC236}">
-                <a16:creationId xmlns:a16="http://schemas.microsoft.com/office/drawing/2014/main" id="{367DD9E0-2577-1A2B-6F60-D345967EC861}"/>
+                <a16:creationId xmlns:a16="http://schemas.microsoft.com/office/drawing/2014/main" id="{B81771F1-D3A3-BE45-43EE-F1719B4F8844}"/>
               </a:ext>
             </a:extLst>
           </p:cNvPr>
@@ -2286,7 +2286,7 @@
           <p:cNvPr id="4" name="Text Placeholder 3">
             <a:extLst>
               <a:ext uri="{FF2B5EF4-FFF2-40B4-BE49-F238E27FC236}">
-                <a16:creationId xmlns:a16="http://schemas.microsoft.com/office/drawing/2014/main" id="{7B89C766-1996-9AAF-52F5-CD301D01ED45}"/>
+                <a16:creationId xmlns:a16="http://schemas.microsoft.com/office/drawing/2014/main" id="{D19BBC47-FF62-4B16-7330-D1E42DC31AC7}"/>
               </a:ext>
             </a:extLst>
           </p:cNvPr>
@@ -2357,7 +2357,7 @@
           <p:cNvPr id="5" name="Date Placeholder 4">
             <a:extLst>
               <a:ext uri="{FF2B5EF4-FFF2-40B4-BE49-F238E27FC236}">
-                <a16:creationId xmlns:a16="http://schemas.microsoft.com/office/drawing/2014/main" id="{27214B1A-298F-F862-3D74-D5BC186BB4CF}"/>
+                <a16:creationId xmlns:a16="http://schemas.microsoft.com/office/drawing/2014/main" id="{01F4CFEF-0A47-1940-37E3-69F610B6386D}"/>
               </a:ext>
             </a:extLst>
           </p:cNvPr>
@@ -2373,9 +2373,9 @@
           <a:bodyPr/>
           <a:lstStyle/>
           <a:p>
-            <a:fld id="{1C7D97E8-F6DA-474E-94AD-0B1DB82ECF2E}" type="datetimeFigureOut">
+            <a:fld id="{8AB44B09-3F86-4311-B16C-FB8A1A86CE05}" type="datetimeFigureOut">
               <a:rPr lang="en-US" smtClean="0"/>
-              <a:t>6/25/2026</a:t>
+              <a:t>6/26/2026</a:t>
             </a:fld>
             <a:endParaRPr lang="en-US"/>
           </a:p>
@@ -2386,7 +2386,7 @@
           <p:cNvPr id="6" name="Footer Placeholder 5">
             <a:extLst>
               <a:ext uri="{FF2B5EF4-FFF2-40B4-BE49-F238E27FC236}">
-                <a16:creationId xmlns:a16="http://schemas.microsoft.com/office/drawing/2014/main" id="{D1EDC4CC-41D9-03B4-DB5B-EF3258EDA47E}"/>
+                <a16:creationId xmlns:a16="http://schemas.microsoft.com/office/drawing/2014/main" id="{862CBC8A-916F-8B21-A09B-124D4DEECF5B}"/>
               </a:ext>
             </a:extLst>
           </p:cNvPr>
@@ -2411,7 +2411,7 @@
           <p:cNvPr id="7" name="Slide Number Placeholder 6">
             <a:extLst>
               <a:ext uri="{FF2B5EF4-FFF2-40B4-BE49-F238E27FC236}">
-                <a16:creationId xmlns:a16="http://schemas.microsoft.com/office/drawing/2014/main" id="{1C858C66-0541-D05C-D56F-7E88D5E09F64}"/>
+                <a16:creationId xmlns:a16="http://schemas.microsoft.com/office/drawing/2014/main" id="{C9A780E5-A51C-9F1D-C050-E649E654A9D8}"/>
               </a:ext>
             </a:extLst>
           </p:cNvPr>
@@ -2427,7 +2427,7 @@
           <a:bodyPr/>
           <a:lstStyle/>
           <a:p>
-            <a:fld id="{D9495CC1-9556-4C76-B880-013C244C7314}" type="slidenum">
+            <a:fld id="{18CF658B-B8D9-4AB7-9284-A0572F664610}" type="slidenum">
               <a:rPr lang="en-US" smtClean="0"/>
               <a:t>‹#›</a:t>
             </a:fld>
@@ -2438,7 +2438,7 @@
     </p:spTree>
     <p:extLst>
       <p:ext uri="{BB962C8B-B14F-4D97-AF65-F5344CB8AC3E}">
-        <p14:creationId xmlns:p14="http://schemas.microsoft.com/office/powerpoint/2010/main" val="3475674301"/>
+        <p14:creationId xmlns:p14="http://schemas.microsoft.com/office/powerpoint/2010/main" val="104679669"/>
       </p:ext>
     </p:extLst>
   </p:cSld>
@@ -2470,7 +2470,7 @@
           <p:cNvPr id="2" name="Title 1">
             <a:extLst>
               <a:ext uri="{FF2B5EF4-FFF2-40B4-BE49-F238E27FC236}">
-                <a16:creationId xmlns:a16="http://schemas.microsoft.com/office/drawing/2014/main" id="{21EA7E6A-DB07-39DD-2568-E55C746E3875}"/>
+                <a16:creationId xmlns:a16="http://schemas.microsoft.com/office/drawing/2014/main" id="{D44CA77E-FE8F-A46B-C54B-ACD55937A94A}"/>
               </a:ext>
             </a:extLst>
           </p:cNvPr>
@@ -2507,7 +2507,7 @@
           <p:cNvPr id="3" name="Picture Placeholder 2">
             <a:extLst>
               <a:ext uri="{FF2B5EF4-FFF2-40B4-BE49-F238E27FC236}">
-                <a16:creationId xmlns:a16="http://schemas.microsoft.com/office/drawing/2014/main" id="{67B93326-1AAE-E473-11AB-03465340C1D5}"/>
+                <a16:creationId xmlns:a16="http://schemas.microsoft.com/office/drawing/2014/main" id="{B98CB20D-DB59-1134-6BA5-A76AB37CB1F2}"/>
               </a:ext>
             </a:extLst>
           </p:cNvPr>
@@ -2574,7 +2574,7 @@
           <p:cNvPr id="4" name="Text Placeholder 3">
             <a:extLst>
               <a:ext uri="{FF2B5EF4-FFF2-40B4-BE49-F238E27FC236}">
-                <a16:creationId xmlns:a16="http://schemas.microsoft.com/office/drawing/2014/main" id="{16106852-875D-9D14-E758-DA89C75D09C9}"/>
+                <a16:creationId xmlns:a16="http://schemas.microsoft.com/office/drawing/2014/main" id="{C0D40CE1-AB97-CF0A-DF92-B41C61596E89}"/>
               </a:ext>
             </a:extLst>
           </p:cNvPr>
@@ -2645,7 +2645,7 @@
           <p:cNvPr id="5" name="Date Placeholder 4">
             <a:extLst>
               <a:ext uri="{FF2B5EF4-FFF2-40B4-BE49-F238E27FC236}">
-                <a16:creationId xmlns:a16="http://schemas.microsoft.com/office/drawing/2014/main" id="{85F9B9EB-845D-F2F7-6546-FF65C73534DB}"/>
+                <a16:creationId xmlns:a16="http://schemas.microsoft.com/office/drawing/2014/main" id="{C5AEBE4F-B084-6FC1-974B-52FCA4EA43FE}"/>
               </a:ext>
             </a:extLst>
           </p:cNvPr>
@@ -2661,9 +2661,9 @@
           <a:bodyPr/>
           <a:lstStyle/>
           <a:p>
-            <a:fld id="{1C7D97E8-F6DA-474E-94AD-0B1DB82ECF2E}" type="datetimeFigureOut">
+            <a:fld id="{8AB44B09-3F86-4311-B16C-FB8A1A86CE05}" type="datetimeFigureOut">
               <a:rPr lang="en-US" smtClean="0"/>
-              <a:t>6/25/2026</a:t>
+              <a:t>6/26/2026</a:t>
             </a:fld>
             <a:endParaRPr lang="en-US"/>
           </a:p>
@@ -2674,7 +2674,7 @@
           <p:cNvPr id="6" name="Footer Placeholder 5">
             <a:extLst>
               <a:ext uri="{FF2B5EF4-FFF2-40B4-BE49-F238E27FC236}">
-                <a16:creationId xmlns:a16="http://schemas.microsoft.com/office/drawing/2014/main" id="{353B9352-69A1-B07C-46D5-979EEBF68918}"/>
+                <a16:creationId xmlns:a16="http://schemas.microsoft.com/office/drawing/2014/main" id="{6584C4B0-399B-F7E0-D059-7CE6A6F4A2EA}"/>
               </a:ext>
             </a:extLst>
           </p:cNvPr>
@@ -2699,7 +2699,7 @@
           <p:cNvPr id="7" name="Slide Number Placeholder 6">
             <a:extLst>
               <a:ext uri="{FF2B5EF4-FFF2-40B4-BE49-F238E27FC236}">
-                <a16:creationId xmlns:a16="http://schemas.microsoft.com/office/drawing/2014/main" id="{37713D49-DD3E-7D24-BC12-C09830AECC71}"/>
+                <a16:creationId xmlns:a16="http://schemas.microsoft.com/office/drawing/2014/main" id="{AF747392-872C-6392-FD40-1BF673007E04}"/>
               </a:ext>
             </a:extLst>
           </p:cNvPr>
@@ -2715,7 +2715,7 @@
           <a:bodyPr/>
           <a:lstStyle/>
           <a:p>
-            <a:fld id="{D9495CC1-9556-4C76-B880-013C244C7314}" type="slidenum">
+            <a:fld id="{18CF658B-B8D9-4AB7-9284-A0572F664610}" type="slidenum">
               <a:rPr lang="en-US" smtClean="0"/>
               <a:t>‹#›</a:t>
             </a:fld>
@@ -2726,7 +2726,7 @@
     </p:spTree>
     <p:extLst>
       <p:ext uri="{BB962C8B-B14F-4D97-AF65-F5344CB8AC3E}">
-        <p14:creationId xmlns:p14="http://schemas.microsoft.com/office/powerpoint/2010/main" val="1182132442"/>
+        <p14:creationId xmlns:p14="http://schemas.microsoft.com/office/powerpoint/2010/main" val="1403472485"/>
       </p:ext>
     </p:extLst>
   </p:cSld>
@@ -2763,7 +2763,7 @@
           <p:cNvPr id="2" name="Title Placeholder 1">
             <a:extLst>
               <a:ext uri="{FF2B5EF4-FFF2-40B4-BE49-F238E27FC236}">
-                <a16:creationId xmlns:a16="http://schemas.microsoft.com/office/drawing/2014/main" id="{A36A918C-7AF3-171E-7D2A-783D2EF94BBA}"/>
+                <a16:creationId xmlns:a16="http://schemas.microsoft.com/office/drawing/2014/main" id="{89DCD35E-7F08-C4E5-8BD8-CA80963F61C1}"/>
               </a:ext>
             </a:extLst>
           </p:cNvPr>
@@ -2801,7 +2801,7 @@
           <p:cNvPr id="3" name="Text Placeholder 2">
             <a:extLst>
               <a:ext uri="{FF2B5EF4-FFF2-40B4-BE49-F238E27FC236}">
-                <a16:creationId xmlns:a16="http://schemas.microsoft.com/office/drawing/2014/main" id="{EDA2A8EE-9E02-D0A4-2FC2-7B2D2C93BBE2}"/>
+                <a16:creationId xmlns:a16="http://schemas.microsoft.com/office/drawing/2014/main" id="{BE3424F6-F3B3-F6E5-A5A6-EF683F4F5ED1}"/>
               </a:ext>
             </a:extLst>
           </p:cNvPr>
@@ -2868,7 +2868,7 @@
           <p:cNvPr id="4" name="Date Placeholder 3">
             <a:extLst>
               <a:ext uri="{FF2B5EF4-FFF2-40B4-BE49-F238E27FC236}">
-                <a16:creationId xmlns:a16="http://schemas.microsoft.com/office/drawing/2014/main" id="{61059CD5-3719-2273-D46C-347883250787}"/>
+                <a16:creationId xmlns:a16="http://schemas.microsoft.com/office/drawing/2014/main" id="{5BAAF705-BC21-E816-16A1-67605EC2CDF3}"/>
               </a:ext>
             </a:extLst>
           </p:cNvPr>
@@ -2902,9 +2902,9 @@
             </a:lvl1pPr>
           </a:lstStyle>
           <a:p>
-            <a:fld id="{1C7D97E8-F6DA-474E-94AD-0B1DB82ECF2E}" type="datetimeFigureOut">
+            <a:fld id="{8AB44B09-3F86-4311-B16C-FB8A1A86CE05}" type="datetimeFigureOut">
               <a:rPr lang="en-US" smtClean="0"/>
-              <a:t>6/25/2026</a:t>
+              <a:t>6/26/2026</a:t>
             </a:fld>
             <a:endParaRPr lang="en-US"/>
           </a:p>
@@ -2915,7 +2915,7 @@
           <p:cNvPr id="5" name="Footer Placeholder 4">
             <a:extLst>
               <a:ext uri="{FF2B5EF4-FFF2-40B4-BE49-F238E27FC236}">
-                <a16:creationId xmlns:a16="http://schemas.microsoft.com/office/drawing/2014/main" id="{B0FC32C0-3EC4-0635-EEBB-95D3464A921F}"/>
+                <a16:creationId xmlns:a16="http://schemas.microsoft.com/office/drawing/2014/main" id="{5E70037C-7C5B-28F2-E96B-A58690358715}"/>
               </a:ext>
             </a:extLst>
           </p:cNvPr>
@@ -2958,7 +2958,7 @@
           <p:cNvPr id="6" name="Slide Number Placeholder 5">
             <a:extLst>
               <a:ext uri="{FF2B5EF4-FFF2-40B4-BE49-F238E27FC236}">
-                <a16:creationId xmlns:a16="http://schemas.microsoft.com/office/drawing/2014/main" id="{93BC4E80-FA20-4637-3EDC-BE9810367657}"/>
+                <a16:creationId xmlns:a16="http://schemas.microsoft.com/office/drawing/2014/main" id="{829B8BB4-DCBF-9992-CEE8-7B6B51242614}"/>
               </a:ext>
             </a:extLst>
           </p:cNvPr>
@@ -2992,7 +2992,7 @@
             </a:lvl1pPr>
           </a:lstStyle>
           <a:p>
-            <a:fld id="{D9495CC1-9556-4C76-B880-013C244C7314}" type="slidenum">
+            <a:fld id="{18CF658B-B8D9-4AB7-9284-A0572F664610}" type="slidenum">
               <a:rPr lang="en-US" smtClean="0"/>
               <a:t>‹#›</a:t>
             </a:fld>
@@ -3003,7 +3003,7 @@
     </p:spTree>
     <p:extLst>
       <p:ext uri="{BB962C8B-B14F-4D97-AF65-F5344CB8AC3E}">
-        <p14:creationId xmlns:p14="http://schemas.microsoft.com/office/powerpoint/2010/main" val="1095883951"/>
+        <p14:creationId xmlns:p14="http://schemas.microsoft.com/office/powerpoint/2010/main" val="780084060"/>
       </p:ext>
     </p:extLst>
   </p:cSld>
@@ -3326,7 +3326,7 @@
           <p:cNvPr id="2" name="TextBox 1">
             <a:extLst>
               <a:ext uri="{FF2B5EF4-FFF2-40B4-BE49-F238E27FC236}">
-                <a16:creationId xmlns:a16="http://schemas.microsoft.com/office/drawing/2014/main" id="{0D5AFCAF-C8E7-C26A-C2A5-8A0700391123}"/>
+                <a16:creationId xmlns:a16="http://schemas.microsoft.com/office/drawing/2014/main" id="{59880BCB-2BAA-3B1F-2D69-07424472C85F}"/>
               </a:ext>
             </a:extLst>
           </p:cNvPr>
@@ -3388,7 +3388,7 @@
     </p:spTree>
     <p:extLst>
       <p:ext uri="{BB962C8B-B14F-4D97-AF65-F5344CB8AC3E}">
-        <p14:creationId xmlns:p14="http://schemas.microsoft.com/office/powerpoint/2010/main" val="2369612303"/>
+        <p14:creationId xmlns:p14="http://schemas.microsoft.com/office/powerpoint/2010/main" val="2284028745"/>
       </p:ext>
     </p:extLst>
   </p:cSld>
